--- a/父啊我向祢呼求.pptx
+++ b/父啊我向祢呼求.pptx
@@ -5,12 +5,17 @@
     <p:sldMasterId id="2147483684" r:id="rId1"/>
   </p:sldMasterIdLst>
   <p:sldIdLst>
-    <p:sldId id="256" r:id="rId2"/>
-    <p:sldId id="257" r:id="rId3"/>
-    <p:sldId id="258" r:id="rId4"/>
-    <p:sldId id="259" r:id="rId5"/>
+    <p:sldId id="391" r:id="rId2"/>
+    <p:sldId id="392" r:id="rId3"/>
+    <p:sldId id="611" r:id="rId4"/>
+    <p:sldId id="612" r:id="rId5"/>
+    <p:sldId id="613" r:id="rId6"/>
+    <p:sldId id="614" r:id="rId7"/>
+    <p:sldId id="615" r:id="rId8"/>
+    <p:sldId id="616" r:id="rId9"/>
+    <p:sldId id="617" r:id="rId10"/>
   </p:sldIdLst>
-  <p:sldSz cx="9144000" cy="6858000" type="screen4x3"/>
+  <p:sldSz cx="12192000" cy="6858000"/>
   <p:notesSz cx="6858000" cy="9144000"/>
   <p:defaultTextStyle>
     <a:defPPr>
@@ -107,6 +112,22 @@
       </a:defRPr>
     </a:lvl9pPr>
   </p:defaultTextStyle>
+  <p:extLst>
+    <p:ext uri="{EFAFB233-063F-42B5-8137-9DF3F51BA10A}">
+      <p15:sldGuideLst xmlns:p15="http://schemas.microsoft.com/office/powerpoint/2012/main">
+        <p15:guide id="1" orient="horz" pos="2160" userDrawn="1">
+          <p15:clr>
+            <a:srgbClr val="A4A3A4"/>
+          </p15:clr>
+        </p15:guide>
+        <p15:guide id="2" pos="3840" userDrawn="1">
+          <p15:clr>
+            <a:srgbClr val="A4A3A4"/>
+          </p15:clr>
+        </p15:guide>
+      </p15:sldGuideLst>
+    </p:ext>
+  </p:extLst>
 </p:presentation>
 </file>
 
@@ -139,8 +160,8 @@
         </p:nvSpPr>
         <p:spPr>
           <a:xfrm>
-            <a:off x="685800" y="2130425"/>
-            <a:ext cx="7772400" cy="1470025"/>
+            <a:off x="914400" y="2130426"/>
+            <a:ext cx="10363200" cy="1470025"/>
           </a:xfrm>
         </p:spPr>
         <p:txBody>
@@ -148,10 +169,9 @@
           <a:lstStyle/>
           <a:p>
             <a:r>
-              <a:rPr lang="zh-TW" altLang="en-US" smtClean="0"/>
+              <a:rPr lang="zh-TW" altLang="en-US"/>
               <a:t>按一下以編輯母片標題樣式</a:t>
             </a:r>
-            <a:endParaRPr lang="zh-TW" altLang="en-US"/>
           </a:p>
         </p:txBody>
       </p:sp>
@@ -167,8 +187,8 @@
         </p:nvSpPr>
         <p:spPr>
           <a:xfrm>
-            <a:off x="1371600" y="3886200"/>
-            <a:ext cx="6400800" cy="1752600"/>
+            <a:off x="1828800" y="3886200"/>
+            <a:ext cx="8534400" cy="1752600"/>
           </a:xfrm>
         </p:spPr>
         <p:txBody>
@@ -267,10 +287,9 @@
           </a:lstStyle>
           <a:p>
             <a:r>
-              <a:rPr lang="zh-TW" altLang="en-US" smtClean="0"/>
+              <a:rPr lang="zh-TW" altLang="en-US"/>
               <a:t>按一下以編輯母片副標題樣式</a:t>
             </a:r>
-            <a:endParaRPr lang="zh-TW" altLang="en-US"/>
           </a:p>
         </p:txBody>
       </p:sp>
@@ -292,7 +311,7 @@
             <a:fld id="{34953BE0-7743-45DC-B6B0-EBE0B7C735AE}" type="datetimeFigureOut">
               <a:rPr lang="zh-TW" altLang="en-US" smtClean="0"/>
               <a:pPr/>
-              <a:t>2018/7/24</a:t>
+              <a:t>2025/5/31</a:t>
             </a:fld>
             <a:endParaRPr lang="zh-TW" altLang="en-US"/>
           </a:p>
@@ -382,10 +401,9 @@
           <a:lstStyle/>
           <a:p>
             <a:r>
-              <a:rPr lang="zh-TW" altLang="en-US" smtClean="0"/>
+              <a:rPr lang="zh-TW" altLang="en-US"/>
               <a:t>按一下以編輯母片標題樣式</a:t>
             </a:r>
-            <a:endParaRPr lang="zh-TW" altLang="en-US"/>
           </a:p>
         </p:txBody>
       </p:sp>
@@ -406,38 +424,37 @@
           <a:p>
             <a:pPr lvl="0"/>
             <a:r>
-              <a:rPr lang="zh-TW" altLang="en-US" smtClean="0"/>
+              <a:rPr lang="zh-TW" altLang="en-US"/>
               <a:t>按一下以編輯母片文字樣式</a:t>
             </a:r>
           </a:p>
           <a:p>
             <a:pPr lvl="1"/>
             <a:r>
-              <a:rPr lang="zh-TW" altLang="en-US" smtClean="0"/>
+              <a:rPr lang="zh-TW" altLang="en-US"/>
               <a:t>第二層</a:t>
             </a:r>
           </a:p>
           <a:p>
             <a:pPr lvl="2"/>
             <a:r>
-              <a:rPr lang="zh-TW" altLang="en-US" smtClean="0"/>
+              <a:rPr lang="zh-TW" altLang="en-US"/>
               <a:t>第三層</a:t>
             </a:r>
           </a:p>
           <a:p>
             <a:pPr lvl="3"/>
             <a:r>
-              <a:rPr lang="zh-TW" altLang="en-US" smtClean="0"/>
+              <a:rPr lang="zh-TW" altLang="en-US"/>
               <a:t>第四層</a:t>
             </a:r>
           </a:p>
           <a:p>
             <a:pPr lvl="4"/>
             <a:r>
-              <a:rPr lang="zh-TW" altLang="en-US" smtClean="0"/>
+              <a:rPr lang="zh-TW" altLang="en-US"/>
               <a:t>第五層</a:t>
             </a:r>
-            <a:endParaRPr lang="zh-TW" altLang="en-US"/>
           </a:p>
         </p:txBody>
       </p:sp>
@@ -459,7 +476,7 @@
             <a:fld id="{34953BE0-7743-45DC-B6B0-EBE0B7C735AE}" type="datetimeFigureOut">
               <a:rPr lang="zh-TW" altLang="en-US" smtClean="0"/>
               <a:pPr/>
-              <a:t>2018/7/24</a:t>
+              <a:t>2025/5/31</a:t>
             </a:fld>
             <a:endParaRPr lang="zh-TW" altLang="en-US"/>
           </a:p>
@@ -545,8 +562,8 @@
         </p:nvSpPr>
         <p:spPr>
           <a:xfrm>
-            <a:off x="6629400" y="274638"/>
-            <a:ext cx="2057400" cy="5851525"/>
+            <a:off x="8839200" y="274639"/>
+            <a:ext cx="2743200" cy="5851525"/>
           </a:xfrm>
         </p:spPr>
         <p:txBody>
@@ -554,10 +571,9 @@
           <a:lstStyle/>
           <a:p>
             <a:r>
-              <a:rPr lang="zh-TW" altLang="en-US" smtClean="0"/>
+              <a:rPr lang="zh-TW" altLang="en-US"/>
               <a:t>按一下以編輯母片標題樣式</a:t>
             </a:r>
-            <a:endParaRPr lang="zh-TW" altLang="en-US"/>
           </a:p>
         </p:txBody>
       </p:sp>
@@ -573,8 +589,8 @@
         </p:nvSpPr>
         <p:spPr>
           <a:xfrm>
-            <a:off x="457200" y="274638"/>
-            <a:ext cx="6019800" cy="5851525"/>
+            <a:off x="609600" y="274639"/>
+            <a:ext cx="8026400" cy="5851525"/>
           </a:xfrm>
         </p:spPr>
         <p:txBody>
@@ -583,38 +599,37 @@
           <a:p>
             <a:pPr lvl="0"/>
             <a:r>
-              <a:rPr lang="zh-TW" altLang="en-US" smtClean="0"/>
+              <a:rPr lang="zh-TW" altLang="en-US"/>
               <a:t>按一下以編輯母片文字樣式</a:t>
             </a:r>
           </a:p>
           <a:p>
             <a:pPr lvl="1"/>
             <a:r>
-              <a:rPr lang="zh-TW" altLang="en-US" smtClean="0"/>
+              <a:rPr lang="zh-TW" altLang="en-US"/>
               <a:t>第二層</a:t>
             </a:r>
           </a:p>
           <a:p>
             <a:pPr lvl="2"/>
             <a:r>
-              <a:rPr lang="zh-TW" altLang="en-US" smtClean="0"/>
+              <a:rPr lang="zh-TW" altLang="en-US"/>
               <a:t>第三層</a:t>
             </a:r>
           </a:p>
           <a:p>
             <a:pPr lvl="3"/>
             <a:r>
-              <a:rPr lang="zh-TW" altLang="en-US" smtClean="0"/>
+              <a:rPr lang="zh-TW" altLang="en-US"/>
               <a:t>第四層</a:t>
             </a:r>
           </a:p>
           <a:p>
             <a:pPr lvl="4"/>
             <a:r>
-              <a:rPr lang="zh-TW" altLang="en-US" smtClean="0"/>
+              <a:rPr lang="zh-TW" altLang="en-US"/>
               <a:t>第五層</a:t>
             </a:r>
-            <a:endParaRPr lang="zh-TW" altLang="en-US"/>
           </a:p>
         </p:txBody>
       </p:sp>
@@ -636,7 +651,7 @@
             <a:fld id="{34953BE0-7743-45DC-B6B0-EBE0B7C735AE}" type="datetimeFigureOut">
               <a:rPr lang="zh-TW" altLang="en-US" smtClean="0"/>
               <a:pPr/>
-              <a:t>2018/7/24</a:t>
+              <a:t>2025/5/31</a:t>
             </a:fld>
             <a:endParaRPr lang="zh-TW" altLang="en-US"/>
           </a:p>
@@ -726,10 +741,9 @@
           <a:lstStyle/>
           <a:p>
             <a:r>
-              <a:rPr lang="zh-TW" altLang="en-US" smtClean="0"/>
+              <a:rPr lang="zh-TW" altLang="en-US"/>
               <a:t>按一下以編輯母片標題樣式</a:t>
             </a:r>
-            <a:endParaRPr lang="zh-TW" altLang="en-US"/>
           </a:p>
         </p:txBody>
       </p:sp>
@@ -750,38 +764,37 @@
           <a:p>
             <a:pPr lvl="0"/>
             <a:r>
-              <a:rPr lang="zh-TW" altLang="en-US" smtClean="0"/>
+              <a:rPr lang="zh-TW" altLang="en-US"/>
               <a:t>按一下以編輯母片文字樣式</a:t>
             </a:r>
           </a:p>
           <a:p>
             <a:pPr lvl="1"/>
             <a:r>
-              <a:rPr lang="zh-TW" altLang="en-US" smtClean="0"/>
+              <a:rPr lang="zh-TW" altLang="en-US"/>
               <a:t>第二層</a:t>
             </a:r>
           </a:p>
           <a:p>
             <a:pPr lvl="2"/>
             <a:r>
-              <a:rPr lang="zh-TW" altLang="en-US" smtClean="0"/>
+              <a:rPr lang="zh-TW" altLang="en-US"/>
               <a:t>第三層</a:t>
             </a:r>
           </a:p>
           <a:p>
             <a:pPr lvl="3"/>
             <a:r>
-              <a:rPr lang="zh-TW" altLang="en-US" smtClean="0"/>
+              <a:rPr lang="zh-TW" altLang="en-US"/>
               <a:t>第四層</a:t>
             </a:r>
           </a:p>
           <a:p>
             <a:pPr lvl="4"/>
             <a:r>
-              <a:rPr lang="zh-TW" altLang="en-US" smtClean="0"/>
+              <a:rPr lang="zh-TW" altLang="en-US"/>
               <a:t>第五層</a:t>
             </a:r>
-            <a:endParaRPr lang="zh-TW" altLang="en-US"/>
           </a:p>
         </p:txBody>
       </p:sp>
@@ -803,7 +816,7 @@
             <a:fld id="{34953BE0-7743-45DC-B6B0-EBE0B7C735AE}" type="datetimeFigureOut">
               <a:rPr lang="zh-TW" altLang="en-US" smtClean="0"/>
               <a:pPr/>
-              <a:t>2018/7/24</a:t>
+              <a:t>2025/5/31</a:t>
             </a:fld>
             <a:endParaRPr lang="zh-TW" altLang="en-US"/>
           </a:p>
@@ -889,8 +902,8 @@
         </p:nvSpPr>
         <p:spPr>
           <a:xfrm>
-            <a:off x="722313" y="4406900"/>
-            <a:ext cx="7772400" cy="1362075"/>
+            <a:off x="963084" y="4406901"/>
+            <a:ext cx="10363200" cy="1362075"/>
           </a:xfrm>
         </p:spPr>
         <p:txBody>
@@ -902,10 +915,9 @@
           </a:lstStyle>
           <a:p>
             <a:r>
-              <a:rPr lang="zh-TW" altLang="en-US" smtClean="0"/>
+              <a:rPr lang="zh-TW" altLang="en-US"/>
               <a:t>按一下以編輯母片標題樣式</a:t>
             </a:r>
-            <a:endParaRPr lang="zh-TW" altLang="en-US"/>
           </a:p>
         </p:txBody>
       </p:sp>
@@ -921,8 +933,8 @@
         </p:nvSpPr>
         <p:spPr>
           <a:xfrm>
-            <a:off x="722313" y="2906713"/>
-            <a:ext cx="7772400" cy="1500187"/>
+            <a:off x="963084" y="2906713"/>
+            <a:ext cx="10363200" cy="1500187"/>
           </a:xfrm>
         </p:spPr>
         <p:txBody>
@@ -1022,7 +1034,7 @@
           <a:p>
             <a:pPr lvl="0"/>
             <a:r>
-              <a:rPr lang="zh-TW" altLang="en-US" smtClean="0"/>
+              <a:rPr lang="zh-TW" altLang="en-US"/>
               <a:t>按一下以編輯母片文字樣式</a:t>
             </a:r>
           </a:p>
@@ -1046,7 +1058,7 @@
             <a:fld id="{34953BE0-7743-45DC-B6B0-EBE0B7C735AE}" type="datetimeFigureOut">
               <a:rPr lang="zh-TW" altLang="en-US" smtClean="0"/>
               <a:pPr/>
-              <a:t>2018/7/24</a:t>
+              <a:t>2025/5/31</a:t>
             </a:fld>
             <a:endParaRPr lang="zh-TW" altLang="en-US"/>
           </a:p>
@@ -1136,10 +1148,9 @@
           <a:lstStyle/>
           <a:p>
             <a:r>
-              <a:rPr lang="zh-TW" altLang="en-US" smtClean="0"/>
+              <a:rPr lang="zh-TW" altLang="en-US"/>
               <a:t>按一下以編輯母片標題樣式</a:t>
             </a:r>
-            <a:endParaRPr lang="zh-TW" altLang="en-US"/>
           </a:p>
         </p:txBody>
       </p:sp>
@@ -1155,8 +1166,8 @@
         </p:nvSpPr>
         <p:spPr>
           <a:xfrm>
-            <a:off x="457200" y="1600200"/>
-            <a:ext cx="4038600" cy="4525963"/>
+            <a:off x="609600" y="1600201"/>
+            <a:ext cx="5384800" cy="4525963"/>
           </a:xfrm>
         </p:spPr>
         <p:txBody>
@@ -1193,38 +1204,37 @@
           <a:p>
             <a:pPr lvl="0"/>
             <a:r>
-              <a:rPr lang="zh-TW" altLang="en-US" smtClean="0"/>
+              <a:rPr lang="zh-TW" altLang="en-US"/>
               <a:t>按一下以編輯母片文字樣式</a:t>
             </a:r>
           </a:p>
           <a:p>
             <a:pPr lvl="1"/>
             <a:r>
-              <a:rPr lang="zh-TW" altLang="en-US" smtClean="0"/>
+              <a:rPr lang="zh-TW" altLang="en-US"/>
               <a:t>第二層</a:t>
             </a:r>
           </a:p>
           <a:p>
             <a:pPr lvl="2"/>
             <a:r>
-              <a:rPr lang="zh-TW" altLang="en-US" smtClean="0"/>
+              <a:rPr lang="zh-TW" altLang="en-US"/>
               <a:t>第三層</a:t>
             </a:r>
           </a:p>
           <a:p>
             <a:pPr lvl="3"/>
             <a:r>
-              <a:rPr lang="zh-TW" altLang="en-US" smtClean="0"/>
+              <a:rPr lang="zh-TW" altLang="en-US"/>
               <a:t>第四層</a:t>
             </a:r>
           </a:p>
           <a:p>
             <a:pPr lvl="4"/>
             <a:r>
-              <a:rPr lang="zh-TW" altLang="en-US" smtClean="0"/>
+              <a:rPr lang="zh-TW" altLang="en-US"/>
               <a:t>第五層</a:t>
             </a:r>
-            <a:endParaRPr lang="zh-TW" altLang="en-US"/>
           </a:p>
         </p:txBody>
       </p:sp>
@@ -1240,8 +1250,8 @@
         </p:nvSpPr>
         <p:spPr>
           <a:xfrm>
-            <a:off x="4648200" y="1600200"/>
-            <a:ext cx="4038600" cy="4525963"/>
+            <a:off x="6197600" y="1600201"/>
+            <a:ext cx="5384800" cy="4525963"/>
           </a:xfrm>
         </p:spPr>
         <p:txBody>
@@ -1278,38 +1288,37 @@
           <a:p>
             <a:pPr lvl="0"/>
             <a:r>
-              <a:rPr lang="zh-TW" altLang="en-US" smtClean="0"/>
+              <a:rPr lang="zh-TW" altLang="en-US"/>
               <a:t>按一下以編輯母片文字樣式</a:t>
             </a:r>
           </a:p>
           <a:p>
             <a:pPr lvl="1"/>
             <a:r>
-              <a:rPr lang="zh-TW" altLang="en-US" smtClean="0"/>
+              <a:rPr lang="zh-TW" altLang="en-US"/>
               <a:t>第二層</a:t>
             </a:r>
           </a:p>
           <a:p>
             <a:pPr lvl="2"/>
             <a:r>
-              <a:rPr lang="zh-TW" altLang="en-US" smtClean="0"/>
+              <a:rPr lang="zh-TW" altLang="en-US"/>
               <a:t>第三層</a:t>
             </a:r>
           </a:p>
           <a:p>
             <a:pPr lvl="3"/>
             <a:r>
-              <a:rPr lang="zh-TW" altLang="en-US" smtClean="0"/>
+              <a:rPr lang="zh-TW" altLang="en-US"/>
               <a:t>第四層</a:t>
             </a:r>
           </a:p>
           <a:p>
             <a:pPr lvl="4"/>
             <a:r>
-              <a:rPr lang="zh-TW" altLang="en-US" smtClean="0"/>
+              <a:rPr lang="zh-TW" altLang="en-US"/>
               <a:t>第五層</a:t>
             </a:r>
-            <a:endParaRPr lang="zh-TW" altLang="en-US"/>
           </a:p>
         </p:txBody>
       </p:sp>
@@ -1331,7 +1340,7 @@
             <a:fld id="{34953BE0-7743-45DC-B6B0-EBE0B7C735AE}" type="datetimeFigureOut">
               <a:rPr lang="zh-TW" altLang="en-US" smtClean="0"/>
               <a:pPr/>
-              <a:t>2018/7/24</a:t>
+              <a:t>2025/5/31</a:t>
             </a:fld>
             <a:endParaRPr lang="zh-TW" altLang="en-US"/>
           </a:p>
@@ -1425,10 +1434,9 @@
           </a:lstStyle>
           <a:p>
             <a:r>
-              <a:rPr lang="zh-TW" altLang="en-US" smtClean="0"/>
+              <a:rPr lang="zh-TW" altLang="en-US"/>
               <a:t>按一下以編輯母片標題樣式</a:t>
             </a:r>
-            <a:endParaRPr lang="zh-TW" altLang="en-US"/>
           </a:p>
         </p:txBody>
       </p:sp>
@@ -1444,8 +1452,8 @@
         </p:nvSpPr>
         <p:spPr>
           <a:xfrm>
-            <a:off x="457200" y="1535113"/>
-            <a:ext cx="4040188" cy="639762"/>
+            <a:off x="609600" y="1535113"/>
+            <a:ext cx="5386917" cy="639762"/>
           </a:xfrm>
         </p:spPr>
         <p:txBody>
@@ -1491,7 +1499,7 @@
           <a:p>
             <a:pPr lvl="0"/>
             <a:r>
-              <a:rPr lang="zh-TW" altLang="en-US" smtClean="0"/>
+              <a:rPr lang="zh-TW" altLang="en-US"/>
               <a:t>按一下以編輯母片文字樣式</a:t>
             </a:r>
           </a:p>
@@ -1509,8 +1517,8 @@
         </p:nvSpPr>
         <p:spPr>
           <a:xfrm>
-            <a:off x="457200" y="2174875"/>
-            <a:ext cx="4040188" cy="3951288"/>
+            <a:off x="609600" y="2174875"/>
+            <a:ext cx="5386917" cy="3951288"/>
           </a:xfrm>
         </p:spPr>
         <p:txBody>
@@ -1547,38 +1555,37 @@
           <a:p>
             <a:pPr lvl="0"/>
             <a:r>
-              <a:rPr lang="zh-TW" altLang="en-US" smtClean="0"/>
+              <a:rPr lang="zh-TW" altLang="en-US"/>
               <a:t>按一下以編輯母片文字樣式</a:t>
             </a:r>
           </a:p>
           <a:p>
             <a:pPr lvl="1"/>
             <a:r>
-              <a:rPr lang="zh-TW" altLang="en-US" smtClean="0"/>
+              <a:rPr lang="zh-TW" altLang="en-US"/>
               <a:t>第二層</a:t>
             </a:r>
           </a:p>
           <a:p>
             <a:pPr lvl="2"/>
             <a:r>
-              <a:rPr lang="zh-TW" altLang="en-US" smtClean="0"/>
+              <a:rPr lang="zh-TW" altLang="en-US"/>
               <a:t>第三層</a:t>
             </a:r>
           </a:p>
           <a:p>
             <a:pPr lvl="3"/>
             <a:r>
-              <a:rPr lang="zh-TW" altLang="en-US" smtClean="0"/>
+              <a:rPr lang="zh-TW" altLang="en-US"/>
               <a:t>第四層</a:t>
             </a:r>
           </a:p>
           <a:p>
             <a:pPr lvl="4"/>
             <a:r>
-              <a:rPr lang="zh-TW" altLang="en-US" smtClean="0"/>
+              <a:rPr lang="zh-TW" altLang="en-US"/>
               <a:t>第五層</a:t>
             </a:r>
-            <a:endParaRPr lang="zh-TW" altLang="en-US"/>
           </a:p>
         </p:txBody>
       </p:sp>
@@ -1594,8 +1601,8 @@
         </p:nvSpPr>
         <p:spPr>
           <a:xfrm>
-            <a:off x="4645025" y="1535113"/>
-            <a:ext cx="4041775" cy="639762"/>
+            <a:off x="6193368" y="1535113"/>
+            <a:ext cx="5389033" cy="639762"/>
           </a:xfrm>
         </p:spPr>
         <p:txBody>
@@ -1641,7 +1648,7 @@
           <a:p>
             <a:pPr lvl="0"/>
             <a:r>
-              <a:rPr lang="zh-TW" altLang="en-US" smtClean="0"/>
+              <a:rPr lang="zh-TW" altLang="en-US"/>
               <a:t>按一下以編輯母片文字樣式</a:t>
             </a:r>
           </a:p>
@@ -1659,8 +1666,8 @@
         </p:nvSpPr>
         <p:spPr>
           <a:xfrm>
-            <a:off x="4645025" y="2174875"/>
-            <a:ext cx="4041775" cy="3951288"/>
+            <a:off x="6193368" y="2174875"/>
+            <a:ext cx="5389033" cy="3951288"/>
           </a:xfrm>
         </p:spPr>
         <p:txBody>
@@ -1697,38 +1704,37 @@
           <a:p>
             <a:pPr lvl="0"/>
             <a:r>
-              <a:rPr lang="zh-TW" altLang="en-US" smtClean="0"/>
+              <a:rPr lang="zh-TW" altLang="en-US"/>
               <a:t>按一下以編輯母片文字樣式</a:t>
             </a:r>
           </a:p>
           <a:p>
             <a:pPr lvl="1"/>
             <a:r>
-              <a:rPr lang="zh-TW" altLang="en-US" smtClean="0"/>
+              <a:rPr lang="zh-TW" altLang="en-US"/>
               <a:t>第二層</a:t>
             </a:r>
           </a:p>
           <a:p>
             <a:pPr lvl="2"/>
             <a:r>
-              <a:rPr lang="zh-TW" altLang="en-US" smtClean="0"/>
+              <a:rPr lang="zh-TW" altLang="en-US"/>
               <a:t>第三層</a:t>
             </a:r>
           </a:p>
           <a:p>
             <a:pPr lvl="3"/>
             <a:r>
-              <a:rPr lang="zh-TW" altLang="en-US" smtClean="0"/>
+              <a:rPr lang="zh-TW" altLang="en-US"/>
               <a:t>第四層</a:t>
             </a:r>
           </a:p>
           <a:p>
             <a:pPr lvl="4"/>
             <a:r>
-              <a:rPr lang="zh-TW" altLang="en-US" smtClean="0"/>
+              <a:rPr lang="zh-TW" altLang="en-US"/>
               <a:t>第五層</a:t>
             </a:r>
-            <a:endParaRPr lang="zh-TW" altLang="en-US"/>
           </a:p>
         </p:txBody>
       </p:sp>
@@ -1750,7 +1756,7 @@
             <a:fld id="{34953BE0-7743-45DC-B6B0-EBE0B7C735AE}" type="datetimeFigureOut">
               <a:rPr lang="zh-TW" altLang="en-US" smtClean="0"/>
               <a:pPr/>
-              <a:t>2018/7/24</a:t>
+              <a:t>2025/5/31</a:t>
             </a:fld>
             <a:endParaRPr lang="zh-TW" altLang="en-US"/>
           </a:p>
@@ -1840,10 +1846,9 @@
           <a:lstStyle/>
           <a:p>
             <a:r>
-              <a:rPr lang="zh-TW" altLang="en-US" smtClean="0"/>
+              <a:rPr lang="zh-TW" altLang="en-US"/>
               <a:t>按一下以編輯母片標題樣式</a:t>
             </a:r>
-            <a:endParaRPr lang="zh-TW" altLang="en-US"/>
           </a:p>
         </p:txBody>
       </p:sp>
@@ -1865,7 +1870,7 @@
             <a:fld id="{34953BE0-7743-45DC-B6B0-EBE0B7C735AE}" type="datetimeFigureOut">
               <a:rPr lang="zh-TW" altLang="en-US" smtClean="0"/>
               <a:pPr/>
-              <a:t>2018/7/24</a:t>
+              <a:t>2025/5/31</a:t>
             </a:fld>
             <a:endParaRPr lang="zh-TW" altLang="en-US"/>
           </a:p>
@@ -1957,7 +1962,7 @@
             <a:fld id="{34953BE0-7743-45DC-B6B0-EBE0B7C735AE}" type="datetimeFigureOut">
               <a:rPr lang="zh-TW" altLang="en-US" smtClean="0"/>
               <a:pPr/>
-              <a:t>2018/7/24</a:t>
+              <a:t>2025/5/31</a:t>
             </a:fld>
             <a:endParaRPr lang="zh-TW" altLang="en-US"/>
           </a:p>
@@ -2043,8 +2048,8 @@
         </p:nvSpPr>
         <p:spPr>
           <a:xfrm>
-            <a:off x="457200" y="273050"/>
-            <a:ext cx="3008313" cy="1162050"/>
+            <a:off x="609601" y="273050"/>
+            <a:ext cx="4011084" cy="1162050"/>
           </a:xfrm>
         </p:spPr>
         <p:txBody>
@@ -2056,10 +2061,9 @@
           </a:lstStyle>
           <a:p>
             <a:r>
-              <a:rPr lang="zh-TW" altLang="en-US" smtClean="0"/>
+              <a:rPr lang="zh-TW" altLang="en-US"/>
               <a:t>按一下以編輯母片標題樣式</a:t>
             </a:r>
-            <a:endParaRPr lang="zh-TW" altLang="en-US"/>
           </a:p>
         </p:txBody>
       </p:sp>
@@ -2075,8 +2079,8 @@
         </p:nvSpPr>
         <p:spPr>
           <a:xfrm>
-            <a:off x="3575050" y="273050"/>
-            <a:ext cx="5111750" cy="5853113"/>
+            <a:off x="4766733" y="273051"/>
+            <a:ext cx="6815667" cy="5853113"/>
           </a:xfrm>
         </p:spPr>
         <p:txBody>
@@ -2113,38 +2117,37 @@
           <a:p>
             <a:pPr lvl="0"/>
             <a:r>
-              <a:rPr lang="zh-TW" altLang="en-US" smtClean="0"/>
+              <a:rPr lang="zh-TW" altLang="en-US"/>
               <a:t>按一下以編輯母片文字樣式</a:t>
             </a:r>
           </a:p>
           <a:p>
             <a:pPr lvl="1"/>
             <a:r>
-              <a:rPr lang="zh-TW" altLang="en-US" smtClean="0"/>
+              <a:rPr lang="zh-TW" altLang="en-US"/>
               <a:t>第二層</a:t>
             </a:r>
           </a:p>
           <a:p>
             <a:pPr lvl="2"/>
             <a:r>
-              <a:rPr lang="zh-TW" altLang="en-US" smtClean="0"/>
+              <a:rPr lang="zh-TW" altLang="en-US"/>
               <a:t>第三層</a:t>
             </a:r>
           </a:p>
           <a:p>
             <a:pPr lvl="3"/>
             <a:r>
-              <a:rPr lang="zh-TW" altLang="en-US" smtClean="0"/>
+              <a:rPr lang="zh-TW" altLang="en-US"/>
               <a:t>第四層</a:t>
             </a:r>
           </a:p>
           <a:p>
             <a:pPr lvl="4"/>
             <a:r>
-              <a:rPr lang="zh-TW" altLang="en-US" smtClean="0"/>
+              <a:rPr lang="zh-TW" altLang="en-US"/>
               <a:t>第五層</a:t>
             </a:r>
-            <a:endParaRPr lang="zh-TW" altLang="en-US"/>
           </a:p>
         </p:txBody>
       </p:sp>
@@ -2160,8 +2163,8 @@
         </p:nvSpPr>
         <p:spPr>
           <a:xfrm>
-            <a:off x="457200" y="1435100"/>
-            <a:ext cx="3008313" cy="4691063"/>
+            <a:off x="609601" y="1435101"/>
+            <a:ext cx="4011084" cy="4691063"/>
           </a:xfrm>
         </p:spPr>
         <p:txBody>
@@ -2207,7 +2210,7 @@
           <a:p>
             <a:pPr lvl="0"/>
             <a:r>
-              <a:rPr lang="zh-TW" altLang="en-US" smtClean="0"/>
+              <a:rPr lang="zh-TW" altLang="en-US"/>
               <a:t>按一下以編輯母片文字樣式</a:t>
             </a:r>
           </a:p>
@@ -2231,7 +2234,7 @@
             <a:fld id="{34953BE0-7743-45DC-B6B0-EBE0B7C735AE}" type="datetimeFigureOut">
               <a:rPr lang="zh-TW" altLang="en-US" smtClean="0"/>
               <a:pPr/>
-              <a:t>2018/7/24</a:t>
+              <a:t>2025/5/31</a:t>
             </a:fld>
             <a:endParaRPr lang="zh-TW" altLang="en-US"/>
           </a:p>
@@ -2317,8 +2320,8 @@
         </p:nvSpPr>
         <p:spPr>
           <a:xfrm>
-            <a:off x="1792288" y="4800600"/>
-            <a:ext cx="5486400" cy="566738"/>
+            <a:off x="2389717" y="4800600"/>
+            <a:ext cx="7315200" cy="566738"/>
           </a:xfrm>
         </p:spPr>
         <p:txBody>
@@ -2330,10 +2333,9 @@
           </a:lstStyle>
           <a:p>
             <a:r>
-              <a:rPr lang="zh-TW" altLang="en-US" smtClean="0"/>
+              <a:rPr lang="zh-TW" altLang="en-US"/>
               <a:t>按一下以編輯母片標題樣式</a:t>
             </a:r>
-            <a:endParaRPr lang="zh-TW" altLang="en-US"/>
           </a:p>
         </p:txBody>
       </p:sp>
@@ -2349,8 +2351,8 @@
         </p:nvSpPr>
         <p:spPr>
           <a:xfrm>
-            <a:off x="1792288" y="612775"/>
-            <a:ext cx="5486400" cy="4114800"/>
+            <a:off x="2389717" y="612775"/>
+            <a:ext cx="7315200" cy="4114800"/>
           </a:xfrm>
         </p:spPr>
         <p:txBody>
@@ -2395,10 +2397,9 @@
           </a:lstStyle>
           <a:p>
             <a:r>
-              <a:rPr lang="zh-TW" altLang="en-US" smtClean="0"/>
+              <a:rPr lang="zh-TW" altLang="en-US"/>
               <a:t>按一下圖示以新增圖片</a:t>
             </a:r>
-            <a:endParaRPr lang="zh-TW" altLang="en-US"/>
           </a:p>
         </p:txBody>
       </p:sp>
@@ -2414,8 +2415,8 @@
         </p:nvSpPr>
         <p:spPr>
           <a:xfrm>
-            <a:off x="1792288" y="5367338"/>
-            <a:ext cx="5486400" cy="804862"/>
+            <a:off x="2389717" y="5367338"/>
+            <a:ext cx="7315200" cy="804862"/>
           </a:xfrm>
         </p:spPr>
         <p:txBody>
@@ -2461,7 +2462,7 @@
           <a:p>
             <a:pPr lvl="0"/>
             <a:r>
-              <a:rPr lang="zh-TW" altLang="en-US" smtClean="0"/>
+              <a:rPr lang="zh-TW" altLang="en-US"/>
               <a:t>按一下以編輯母片文字樣式</a:t>
             </a:r>
           </a:p>
@@ -2485,7 +2486,7 @@
             <a:fld id="{34953BE0-7743-45DC-B6B0-EBE0B7C735AE}" type="datetimeFigureOut">
               <a:rPr lang="zh-TW" altLang="en-US" smtClean="0"/>
               <a:pPr/>
-              <a:t>2018/7/24</a:t>
+              <a:t>2025/5/31</a:t>
             </a:fld>
             <a:endParaRPr lang="zh-TW" altLang="en-US"/>
           </a:p>
@@ -2581,8 +2582,8 @@
         </p:nvSpPr>
         <p:spPr>
           <a:xfrm>
-            <a:off x="457200" y="274638"/>
-            <a:ext cx="8229600" cy="1143000"/>
+            <a:off x="609600" y="274638"/>
+            <a:ext cx="10972800" cy="1143000"/>
           </a:xfrm>
           <a:prstGeom prst="rect">
             <a:avLst/>
@@ -2595,10 +2596,9 @@
           <a:lstStyle/>
           <a:p>
             <a:r>
-              <a:rPr lang="zh-TW" altLang="en-US" smtClean="0"/>
+              <a:rPr lang="zh-TW" altLang="en-US"/>
               <a:t>按一下以編輯母片標題樣式</a:t>
             </a:r>
-            <a:endParaRPr lang="zh-TW" altLang="en-US"/>
           </a:p>
         </p:txBody>
       </p:sp>
@@ -2614,8 +2614,8 @@
         </p:nvSpPr>
         <p:spPr>
           <a:xfrm>
-            <a:off x="457200" y="1600200"/>
-            <a:ext cx="8229600" cy="4525963"/>
+            <a:off x="609600" y="1600201"/>
+            <a:ext cx="10972800" cy="4525963"/>
           </a:xfrm>
           <a:prstGeom prst="rect">
             <a:avLst/>
@@ -2629,38 +2629,37 @@
           <a:p>
             <a:pPr lvl="0"/>
             <a:r>
-              <a:rPr lang="zh-TW" altLang="en-US" smtClean="0"/>
+              <a:rPr lang="zh-TW" altLang="en-US"/>
               <a:t>按一下以編輯母片文字樣式</a:t>
             </a:r>
           </a:p>
           <a:p>
             <a:pPr lvl="1"/>
             <a:r>
-              <a:rPr lang="zh-TW" altLang="en-US" smtClean="0"/>
+              <a:rPr lang="zh-TW" altLang="en-US"/>
               <a:t>第二層</a:t>
             </a:r>
           </a:p>
           <a:p>
             <a:pPr lvl="2"/>
             <a:r>
-              <a:rPr lang="zh-TW" altLang="en-US" smtClean="0"/>
+              <a:rPr lang="zh-TW" altLang="en-US"/>
               <a:t>第三層</a:t>
             </a:r>
           </a:p>
           <a:p>
             <a:pPr lvl="3"/>
             <a:r>
-              <a:rPr lang="zh-TW" altLang="en-US" smtClean="0"/>
+              <a:rPr lang="zh-TW" altLang="en-US"/>
               <a:t>第四層</a:t>
             </a:r>
           </a:p>
           <a:p>
             <a:pPr lvl="4"/>
             <a:r>
-              <a:rPr lang="zh-TW" altLang="en-US" smtClean="0"/>
+              <a:rPr lang="zh-TW" altLang="en-US"/>
               <a:t>第五層</a:t>
             </a:r>
-            <a:endParaRPr lang="zh-TW" altLang="en-US"/>
           </a:p>
         </p:txBody>
       </p:sp>
@@ -2676,8 +2675,8 @@
         </p:nvSpPr>
         <p:spPr>
           <a:xfrm>
-            <a:off x="457200" y="6356350"/>
-            <a:ext cx="2133600" cy="365125"/>
+            <a:off x="609600" y="6356351"/>
+            <a:ext cx="2844800" cy="365125"/>
           </a:xfrm>
           <a:prstGeom prst="rect">
             <a:avLst/>
@@ -2700,7 +2699,7 @@
             <a:fld id="{34953BE0-7743-45DC-B6B0-EBE0B7C735AE}" type="datetimeFigureOut">
               <a:rPr lang="zh-TW" altLang="en-US" smtClean="0"/>
               <a:pPr/>
-              <a:t>2018/7/24</a:t>
+              <a:t>2025/5/31</a:t>
             </a:fld>
             <a:endParaRPr lang="zh-TW" altLang="en-US"/>
           </a:p>
@@ -2718,8 +2717,8 @@
         </p:nvSpPr>
         <p:spPr>
           <a:xfrm>
-            <a:off x="3124200" y="6356350"/>
-            <a:ext cx="2895600" cy="365125"/>
+            <a:off x="4165600" y="6356351"/>
+            <a:ext cx="3860800" cy="365125"/>
           </a:xfrm>
           <a:prstGeom prst="rect">
             <a:avLst/>
@@ -2755,8 +2754,8 @@
         </p:nvSpPr>
         <p:spPr>
           <a:xfrm>
-            <a:off x="6553200" y="6356350"/>
-            <a:ext cx="2133600" cy="365125"/>
+            <a:off x="8737600" y="6356351"/>
+            <a:ext cx="2844800" cy="365125"/>
           </a:xfrm>
           <a:prstGeom prst="rect">
             <a:avLst/>
@@ -3059,7 +3058,13 @@
   <p:cSld>
     <p:spTree>
       <p:nvGrpSpPr>
-        <p:cNvPr id="1" name=""/>
+        <p:cNvPr id="1" name="">
+          <a:extLst>
+            <a:ext uri="{FF2B5EF4-FFF2-40B4-BE49-F238E27FC236}">
+              <a16:creationId xmlns:a16="http://schemas.microsoft.com/office/drawing/2014/main" id="{5F20F3D7-EDDF-CE30-9060-314A88E3730B}"/>
+            </a:ext>
+          </a:extLst>
+        </p:cNvPr>
         <p:cNvGrpSpPr/>
         <p:nvPr/>
       </p:nvGrpSpPr>
@@ -3073,7 +3078,13 @@
       </p:grpSpPr>
       <p:sp>
         <p:nvSpPr>
-          <p:cNvPr id="2" name="標題 1"/>
+          <p:cNvPr id="4" name="標題 3">
+            <a:extLst>
+              <a:ext uri="{FF2B5EF4-FFF2-40B4-BE49-F238E27FC236}">
+                <a16:creationId xmlns:a16="http://schemas.microsoft.com/office/drawing/2014/main" id="{CD6A41DD-B5E6-D530-EC0F-85726817D119}"/>
+              </a:ext>
+            </a:extLst>
+          </p:cNvPr>
           <p:cNvSpPr>
             <a:spLocks noGrp="1"/>
           </p:cNvSpPr>
@@ -3081,186 +3092,58 @@
             <p:ph type="title"/>
           </p:nvPr>
         </p:nvSpPr>
-        <p:spPr/>
-        <p:txBody>
-          <a:bodyPr/>
-          <a:lstStyle/>
-          <a:p>
-            <a:r>
-              <a:rPr lang="zh-TW" altLang="en-US" b="1" dirty="0">
+        <p:spPr>
+          <a:xfrm>
+            <a:off x="0" y="2660915"/>
+            <a:ext cx="12192000" cy="1143000"/>
+          </a:xfrm>
+        </p:spPr>
+        <p:txBody>
+          <a:bodyPr>
+            <a:noAutofit/>
+          </a:bodyPr>
+          <a:lstStyle/>
+          <a:p>
+            <a:r>
+              <a:rPr lang="zh-CN" altLang="en-US" sz="7200" b="1" i="1" dirty="0">
+                <a:solidFill>
+                  <a:srgbClr val="000066"/>
+                </a:solidFill>
+                <a:effectLst>
+                  <a:outerShdw blurRad="38100" dist="38100" dir="2700000" algn="tl">
+                    <a:srgbClr val="000000">
+                      <a:alpha val="43137"/>
+                    </a:srgbClr>
+                  </a:outerShdw>
+                </a:effectLst>
                 <a:latin typeface="微軟正黑體" pitchFamily="34" charset="-120"/>
                 <a:ea typeface="微軟正黑體" pitchFamily="34" charset="-120"/>
               </a:rPr>
-              <a:t>父</a:t>
-            </a:r>
-            <a:r>
-              <a:rPr lang="zh-TW" altLang="en-US" b="1" dirty="0" smtClean="0">
-                <a:latin typeface="微軟正黑體" pitchFamily="34" charset="-120"/>
-                <a:ea typeface="微軟正黑體" pitchFamily="34" charset="-120"/>
-              </a:rPr>
-              <a:t>啊我</a:t>
-            </a:r>
-            <a:r>
-              <a:rPr lang="zh-TW" altLang="en-US" b="1" dirty="0">
-                <a:latin typeface="微軟正黑體" pitchFamily="34" charset="-120"/>
-                <a:ea typeface="微軟正黑體" pitchFamily="34" charset="-120"/>
-              </a:rPr>
-              <a:t>向祢呼求</a:t>
-            </a:r>
-          </a:p>
-        </p:txBody>
-      </p:sp>
-      <p:sp>
-        <p:nvSpPr>
-          <p:cNvPr id="4" name="內容版面配置區 3"/>
-          <p:cNvSpPr>
-            <a:spLocks noGrp="1"/>
-          </p:cNvSpPr>
-          <p:nvPr>
-            <p:ph idx="1"/>
-          </p:nvPr>
-        </p:nvSpPr>
-        <p:spPr/>
-        <p:txBody>
-          <a:bodyPr>
-            <a:noAutofit/>
-          </a:bodyPr>
-          <a:lstStyle/>
-          <a:p>
-            <a:pPr algn="ctr">
-              <a:buNone/>
-            </a:pPr>
-            <a:r>
-              <a:rPr lang="zh-TW" altLang="en-US" sz="5400" b="1" dirty="0">
-                <a:latin typeface="微軟正黑體" pitchFamily="34" charset="-120"/>
-                <a:ea typeface="微軟正黑體" pitchFamily="34" charset="-120"/>
-              </a:rPr>
-              <a:t>祢知道我最深的</a:t>
-            </a:r>
-            <a:r>
-              <a:rPr lang="zh-TW" altLang="en-US" sz="5400" b="1" dirty="0" smtClean="0">
-                <a:latin typeface="微軟正黑體" pitchFamily="34" charset="-120"/>
-                <a:ea typeface="微軟正黑體" pitchFamily="34" charset="-120"/>
-              </a:rPr>
-              <a:t>意念</a:t>
-            </a:r>
-            <a:endParaRPr lang="en-US" altLang="zh-TW" sz="5400" b="1" dirty="0">
+              <a:t>父啊！我向祢呼求</a:t>
+            </a:r>
+            <a:endParaRPr lang="zh-TW" altLang="en-US" sz="7200" b="1" i="1" dirty="0">
+              <a:solidFill>
+                <a:srgbClr val="000066"/>
+              </a:solidFill>
+              <a:effectLst>
+                <a:outerShdw blurRad="38100" dist="38100" dir="2700000" algn="tl">
+                  <a:srgbClr val="000000">
+                    <a:alpha val="43137"/>
+                  </a:srgbClr>
+                </a:outerShdw>
+              </a:effectLst>
               <a:latin typeface="微軟正黑體" pitchFamily="34" charset="-120"/>
               <a:ea typeface="微軟正黑體" pitchFamily="34" charset="-120"/>
             </a:endParaRPr>
           </a:p>
-          <a:p>
-            <a:pPr algn="ctr">
-              <a:buNone/>
-            </a:pPr>
-            <a:r>
-              <a:rPr lang="zh-TW" altLang="en-US" sz="5400" b="1" dirty="0" smtClean="0">
-                <a:latin typeface="微軟正黑體" pitchFamily="34" charset="-120"/>
-                <a:ea typeface="微軟正黑體" pitchFamily="34" charset="-120"/>
-              </a:rPr>
-              <a:t>祢</a:t>
-            </a:r>
-            <a:r>
-              <a:rPr lang="zh-TW" altLang="en-US" sz="5400" b="1" dirty="0">
-                <a:latin typeface="微軟正黑體" pitchFamily="34" charset="-120"/>
-                <a:ea typeface="微軟正黑體" pitchFamily="34" charset="-120"/>
-              </a:rPr>
-              <a:t>明瞭我內裏的</a:t>
-            </a:r>
-            <a:r>
-              <a:rPr lang="zh-TW" altLang="en-US" sz="5400" b="1" dirty="0" smtClean="0">
-                <a:latin typeface="微軟正黑體" pitchFamily="34" charset="-120"/>
-                <a:ea typeface="微軟正黑體" pitchFamily="34" charset="-120"/>
-              </a:rPr>
-              <a:t>一切</a:t>
-            </a:r>
-            <a:endParaRPr lang="en-US" altLang="zh-TW" sz="5400" b="1" dirty="0" smtClean="0">
-              <a:latin typeface="微軟正黑體" pitchFamily="34" charset="-120"/>
-              <a:ea typeface="微軟正黑體" pitchFamily="34" charset="-120"/>
-            </a:endParaRPr>
-          </a:p>
-          <a:p>
-            <a:pPr algn="ctr">
-              <a:buNone/>
-            </a:pPr>
-            <a:r>
-              <a:rPr lang="zh-TW" altLang="en-US" sz="5400" b="1" dirty="0" smtClean="0">
-                <a:latin typeface="微軟正黑體" pitchFamily="34" charset="-120"/>
-                <a:ea typeface="微軟正黑體" pitchFamily="34" charset="-120"/>
-              </a:rPr>
-              <a:t>但</a:t>
-            </a:r>
-            <a:r>
-              <a:rPr lang="zh-TW" altLang="en-US" sz="5400" b="1" dirty="0">
-                <a:latin typeface="微軟正黑體" pitchFamily="34" charset="-120"/>
-                <a:ea typeface="微軟正黑體" pitchFamily="34" charset="-120"/>
-              </a:rPr>
-              <a:t>祢從不</a:t>
-            </a:r>
-            <a:r>
-              <a:rPr lang="zh-TW" altLang="en-US" sz="5400" b="1" dirty="0" smtClean="0">
-                <a:latin typeface="微軟正黑體" pitchFamily="34" charset="-120"/>
-                <a:ea typeface="微軟正黑體" pitchFamily="34" charset="-120"/>
-              </a:rPr>
-              <a:t>定罪</a:t>
-            </a:r>
-            <a:endParaRPr lang="en-US" altLang="zh-TW" sz="5400" b="1" dirty="0">
-              <a:latin typeface="微軟正黑體" pitchFamily="34" charset="-120"/>
-              <a:ea typeface="微軟正黑體" pitchFamily="34" charset="-120"/>
-            </a:endParaRPr>
-          </a:p>
-          <a:p>
-            <a:pPr algn="ctr">
-              <a:buNone/>
-            </a:pPr>
-            <a:r>
-              <a:rPr lang="zh-TW" altLang="en-US" sz="5400" b="1" dirty="0" smtClean="0">
-                <a:latin typeface="微軟正黑體" pitchFamily="34" charset="-120"/>
-                <a:ea typeface="微軟正黑體" pitchFamily="34" charset="-120"/>
-              </a:rPr>
-              <a:t>滿</a:t>
-            </a:r>
-            <a:r>
-              <a:rPr lang="zh-TW" altLang="en-US" sz="5400" b="1" dirty="0">
-                <a:latin typeface="微軟正黑體" pitchFamily="34" charset="-120"/>
-                <a:ea typeface="微軟正黑體" pitchFamily="34" charset="-120"/>
-              </a:rPr>
-              <a:t>有憐憫和</a:t>
-            </a:r>
-            <a:r>
-              <a:rPr lang="zh-TW" altLang="en-US" sz="5400" b="1" dirty="0" smtClean="0">
-                <a:latin typeface="微軟正黑體" pitchFamily="34" charset="-120"/>
-                <a:ea typeface="微軟正黑體" pitchFamily="34" charset="-120"/>
-              </a:rPr>
-              <a:t>恩惠</a:t>
-            </a:r>
-            <a:endParaRPr lang="en-US" altLang="zh-TW" sz="5400" b="1" dirty="0" smtClean="0">
-              <a:latin typeface="微軟正黑體" pitchFamily="34" charset="-120"/>
-              <a:ea typeface="微軟正黑體" pitchFamily="34" charset="-120"/>
-            </a:endParaRPr>
-          </a:p>
-          <a:p>
-            <a:pPr algn="ctr">
-              <a:buNone/>
-            </a:pPr>
-            <a:r>
-              <a:rPr lang="zh-TW" altLang="en-US" sz="5400" b="1" dirty="0" smtClean="0">
-                <a:latin typeface="微軟正黑體" pitchFamily="34" charset="-120"/>
-                <a:ea typeface="微軟正黑體" pitchFamily="34" charset="-120"/>
-              </a:rPr>
-              <a:t>溫柔</a:t>
-            </a:r>
-            <a:r>
-              <a:rPr lang="zh-TW" altLang="en-US" sz="5400" b="1" dirty="0">
-                <a:latin typeface="微軟正黑體" pitchFamily="34" charset="-120"/>
-                <a:ea typeface="微軟正黑體" pitchFamily="34" charset="-120"/>
-              </a:rPr>
-              <a:t>的光照亮我心扉</a:t>
-            </a:r>
-          </a:p>
         </p:txBody>
       </p:sp>
     </p:spTree>
+    <p:extLst>
+      <p:ext uri="{BB962C8B-B14F-4D97-AF65-F5344CB8AC3E}">
+        <p14:creationId xmlns:p14="http://schemas.microsoft.com/office/powerpoint/2010/main" val="388492399"/>
+      </p:ext>
+    </p:extLst>
   </p:cSld>
   <p:clrMapOvr>
     <a:masterClrMapping/>
@@ -3273,7 +3156,13 @@
   <p:cSld>
     <p:spTree>
       <p:nvGrpSpPr>
-        <p:cNvPr id="1" name=""/>
+        <p:cNvPr id="1" name="">
+          <a:extLst>
+            <a:ext uri="{FF2B5EF4-FFF2-40B4-BE49-F238E27FC236}">
+              <a16:creationId xmlns:a16="http://schemas.microsoft.com/office/drawing/2014/main" id="{499F6A04-361B-D03C-72FC-83746A3861FC}"/>
+            </a:ext>
+          </a:extLst>
+        </p:cNvPr>
         <p:cNvGrpSpPr/>
         <p:nvPr/>
       </p:nvGrpSpPr>
@@ -3287,196 +3176,137 @@
       </p:grpSpPr>
       <p:sp>
         <p:nvSpPr>
-          <p:cNvPr id="2" name="標題 1"/>
-          <p:cNvSpPr>
-            <a:spLocks noGrp="1"/>
-          </p:cNvSpPr>
-          <p:nvPr>
-            <p:ph type="title"/>
-          </p:nvPr>
-        </p:nvSpPr>
-        <p:spPr/>
-        <p:txBody>
-          <a:bodyPr>
+          <p:cNvPr id="5" name="內容版面配置區 4">
+            <a:extLst>
+              <a:ext uri="{FF2B5EF4-FFF2-40B4-BE49-F238E27FC236}">
+                <a16:creationId xmlns:a16="http://schemas.microsoft.com/office/drawing/2014/main" id="{EE77592B-EE8B-614D-4160-CDFC7BCE80DB}"/>
+              </a:ext>
+            </a:extLst>
+          </p:cNvPr>
+          <p:cNvSpPr>
+            <a:spLocks noGrp="1"/>
+          </p:cNvSpPr>
+          <p:nvPr>
+            <p:ph idx="1"/>
+          </p:nvPr>
+        </p:nvSpPr>
+        <p:spPr>
+          <a:xfrm>
+            <a:off x="0" y="2084853"/>
+            <a:ext cx="12192000" cy="2404863"/>
+          </a:xfrm>
+        </p:spPr>
+        <p:txBody>
+          <a:bodyPr anchor="ctr">
             <a:normAutofit/>
           </a:bodyPr>
           <a:lstStyle/>
           <a:p>
-            <a:r>
-              <a:rPr lang="zh-TW" altLang="en-US" b="1" dirty="0">
+            <a:pPr algn="ctr">
+              <a:buNone/>
+            </a:pPr>
+            <a:r>
+              <a:rPr lang="zh-TW" altLang="en-US" sz="6400" b="1" dirty="0">
+                <a:solidFill>
+                  <a:srgbClr val="000066"/>
+                </a:solidFill>
                 <a:latin typeface="微軟正黑體" pitchFamily="34" charset="-120"/>
                 <a:ea typeface="微軟正黑體" pitchFamily="34" charset="-120"/>
               </a:rPr>
-              <a:t>父</a:t>
-            </a:r>
-            <a:r>
-              <a:rPr lang="zh-TW" altLang="en-US" b="1" dirty="0" smtClean="0">
+              <a:t>祢知道我最深的意念</a:t>
+            </a:r>
+          </a:p>
+          <a:p>
+            <a:pPr algn="ctr">
+              <a:buNone/>
+            </a:pPr>
+            <a:r>
+              <a:rPr lang="zh-TW" altLang="en-US" sz="6400" b="1" dirty="0">
+                <a:solidFill>
+                  <a:srgbClr val="000066"/>
+                </a:solidFill>
                 <a:latin typeface="微軟正黑體" pitchFamily="34" charset="-120"/>
                 <a:ea typeface="微軟正黑體" pitchFamily="34" charset="-120"/>
               </a:rPr>
-              <a:t>啊我</a:t>
-            </a:r>
-            <a:r>
-              <a:rPr lang="zh-TW" altLang="en-US" b="1" dirty="0">
-                <a:latin typeface="微軟正黑體" pitchFamily="34" charset="-120"/>
-                <a:ea typeface="微軟正黑體" pitchFamily="34" charset="-120"/>
+              <a:t>祢明瞭我內裏的一切</a:t>
+            </a:r>
+          </a:p>
+        </p:txBody>
+      </p:sp>
+      <p:sp>
+        <p:nvSpPr>
+          <p:cNvPr id="3" name="TextBox 2">
+            <a:extLst>
+              <a:ext uri="{FF2B5EF4-FFF2-40B4-BE49-F238E27FC236}">
+                <a16:creationId xmlns:a16="http://schemas.microsoft.com/office/drawing/2014/main" id="{FA175DD0-F211-14DE-420F-4A50F79B6BD2}"/>
+              </a:ext>
+            </a:extLst>
+          </p:cNvPr>
+          <p:cNvSpPr txBox="1"/>
+          <p:nvPr/>
+        </p:nvSpPr>
+        <p:spPr>
+          <a:xfrm>
+            <a:off x="0" y="5157194"/>
+            <a:ext cx="12192000" cy="584775"/>
+          </a:xfrm>
+          <a:prstGeom prst="rect">
+            <a:avLst/>
+          </a:prstGeom>
+          <a:noFill/>
+        </p:spPr>
+        <p:txBody>
+          <a:bodyPr wrap="square" rtlCol="0">
+            <a:spAutoFit/>
+          </a:bodyPr>
+          <a:lstStyle/>
+          <a:p>
+            <a:pPr algn="ctr"/>
+            <a:r>
+              <a:rPr lang="en-US" sz="3200" b="1" dirty="0">
+                <a:solidFill>
+                  <a:srgbClr val="000066"/>
+                </a:solidFill>
+                <a:latin typeface="Microsoft JhengHei" panose="020B0604030504040204" pitchFamily="34" charset="-120"/>
+                <a:ea typeface="Microsoft JhengHei" panose="020B0604030504040204" pitchFamily="34" charset="-120"/>
               </a:rPr>
-              <a:t>向祢呼求</a:t>
-            </a:r>
-          </a:p>
-        </p:txBody>
-      </p:sp>
-      <p:sp>
-        <p:nvSpPr>
-          <p:cNvPr id="4" name="內容版面配置區 3"/>
-          <p:cNvSpPr>
-            <a:spLocks noGrp="1"/>
-          </p:cNvSpPr>
-          <p:nvPr>
-            <p:ph idx="1"/>
-          </p:nvPr>
-        </p:nvSpPr>
-        <p:spPr/>
-        <p:txBody>
-          <a:bodyPr>
-            <a:noAutofit/>
-          </a:bodyPr>
-          <a:lstStyle/>
-          <a:p>
-            <a:pPr algn="ctr">
-              <a:buNone/>
-            </a:pPr>
-            <a:r>
-              <a:rPr lang="zh-TW" altLang="en-US" sz="5400" b="1" dirty="0">
-                <a:latin typeface="微軟正黑體" pitchFamily="34" charset="-120"/>
-                <a:ea typeface="微軟正黑體" pitchFamily="34" charset="-120"/>
+              <a:t>( </a:t>
+            </a:r>
+            <a:r>
+              <a:rPr lang="zh-CN" altLang="en-US" sz="3200" b="1" dirty="0">
+                <a:solidFill>
+                  <a:srgbClr val="000066"/>
+                </a:solidFill>
+                <a:latin typeface="Microsoft JhengHei" panose="020B0604030504040204" pitchFamily="34" charset="-120"/>
+                <a:ea typeface="Microsoft JhengHei" panose="020B0604030504040204" pitchFamily="34" charset="-120"/>
               </a:rPr>
-              <a:t>我追想祢過往的</a:t>
-            </a:r>
-            <a:r>
-              <a:rPr lang="zh-TW" altLang="en-US" sz="5400" b="1" dirty="0" smtClean="0">
-                <a:latin typeface="微軟正黑體" pitchFamily="34" charset="-120"/>
-                <a:ea typeface="微軟正黑體" pitchFamily="34" charset="-120"/>
+              <a:t>正歌</a:t>
+            </a:r>
+            <a:r>
+              <a:rPr lang="en-US" sz="3200" b="1" dirty="0">
+                <a:solidFill>
+                  <a:srgbClr val="000066"/>
+                </a:solidFill>
+                <a:latin typeface="Microsoft JhengHei" panose="020B0604030504040204" pitchFamily="34" charset="-120"/>
+                <a:ea typeface="Microsoft JhengHei" panose="020B0604030504040204" pitchFamily="34" charset="-120"/>
               </a:rPr>
-              <a:t>作為</a:t>
-            </a:r>
-            <a:endParaRPr lang="en-US" altLang="zh-TW" sz="5400" b="1" dirty="0">
-              <a:latin typeface="微軟正黑體" pitchFamily="34" charset="-120"/>
-              <a:ea typeface="微軟正黑體" pitchFamily="34" charset="-120"/>
+              <a:t> )</a:t>
+            </a:r>
+            <a:endParaRPr lang="vi-VN" sz="3200" b="1" dirty="0">
+              <a:solidFill>
+                <a:srgbClr val="000066"/>
+              </a:solidFill>
+              <a:ea typeface="Microsoft JhengHei" panose="020B0604030504040204" pitchFamily="34" charset="-120"/>
             </a:endParaRPr>
           </a:p>
-          <a:p>
-            <a:pPr algn="ctr">
-              <a:buNone/>
-            </a:pPr>
-            <a:r>
-              <a:rPr lang="zh-TW" altLang="en-US" sz="5400" b="1" dirty="0" smtClean="0">
-                <a:latin typeface="微軟正黑體" pitchFamily="34" charset="-120"/>
-                <a:ea typeface="微軟正黑體" pitchFamily="34" charset="-120"/>
-              </a:rPr>
-              <a:t>我</a:t>
-            </a:r>
-            <a:r>
-              <a:rPr lang="zh-TW" altLang="en-US" sz="5400" b="1" dirty="0">
-                <a:latin typeface="微軟正黑體" pitchFamily="34" charset="-120"/>
-                <a:ea typeface="微軟正黑體" pitchFamily="34" charset="-120"/>
-              </a:rPr>
-              <a:t>思念祢同在的榮</a:t>
-            </a:r>
-            <a:r>
-              <a:rPr lang="zh-TW" altLang="en-US" sz="5400" b="1" dirty="0" smtClean="0">
-                <a:latin typeface="微軟正黑體" pitchFamily="34" charset="-120"/>
-                <a:ea typeface="微軟正黑體" pitchFamily="34" charset="-120"/>
-              </a:rPr>
-              <a:t>顏</a:t>
-            </a:r>
-            <a:endParaRPr lang="en-US" altLang="zh-TW" sz="5400" b="1" dirty="0" smtClean="0">
-              <a:latin typeface="微軟正黑體" pitchFamily="34" charset="-120"/>
-              <a:ea typeface="微軟正黑體" pitchFamily="34" charset="-120"/>
-            </a:endParaRPr>
-          </a:p>
-          <a:p>
-            <a:pPr algn="ctr">
-              <a:buNone/>
-            </a:pPr>
-            <a:r>
-              <a:rPr lang="zh-TW" altLang="en-US" sz="5400" b="1" dirty="0" smtClean="0">
-                <a:latin typeface="微軟正黑體" pitchFamily="34" charset="-120"/>
-                <a:ea typeface="微軟正黑體" pitchFamily="34" charset="-120"/>
-              </a:rPr>
-              <a:t>我</a:t>
-            </a:r>
-            <a:r>
-              <a:rPr lang="zh-TW" altLang="en-US" sz="5400" b="1" dirty="0">
-                <a:latin typeface="微軟正黑體" pitchFamily="34" charset="-120"/>
-                <a:ea typeface="微軟正黑體" pitchFamily="34" charset="-120"/>
-              </a:rPr>
-              <a:t>的心渴想</a:t>
-            </a:r>
-            <a:r>
-              <a:rPr lang="zh-TW" altLang="en-US" sz="5400" b="1" dirty="0" smtClean="0">
-                <a:latin typeface="微軟正黑體" pitchFamily="34" charset="-120"/>
-                <a:ea typeface="微軟正黑體" pitchFamily="34" charset="-120"/>
-              </a:rPr>
-              <a:t>祢</a:t>
-            </a:r>
-            <a:endParaRPr lang="en-US" altLang="zh-TW" sz="5400" b="1" dirty="0">
-              <a:latin typeface="微軟正黑體" pitchFamily="34" charset="-120"/>
-              <a:ea typeface="微軟正黑體" pitchFamily="34" charset="-120"/>
-            </a:endParaRPr>
-          </a:p>
-          <a:p>
-            <a:pPr algn="ctr">
-              <a:buNone/>
-            </a:pPr>
-            <a:r>
-              <a:rPr lang="zh-TW" altLang="en-US" sz="5400" b="1" dirty="0" smtClean="0">
-                <a:latin typeface="微軟正黑體" pitchFamily="34" charset="-120"/>
-                <a:ea typeface="微軟正黑體" pitchFamily="34" charset="-120"/>
-              </a:rPr>
-              <a:t>如</a:t>
-            </a:r>
-            <a:r>
-              <a:rPr lang="zh-TW" altLang="en-US" sz="5400" b="1" dirty="0">
-                <a:latin typeface="微軟正黑體" pitchFamily="34" charset="-120"/>
-                <a:ea typeface="微軟正黑體" pitchFamily="34" charset="-120"/>
-              </a:rPr>
-              <a:t>乾旱之地盼</a:t>
-            </a:r>
-            <a:r>
-              <a:rPr lang="zh-TW" altLang="en-US" sz="5400" b="1" dirty="0" smtClean="0">
-                <a:latin typeface="微軟正黑體" pitchFamily="34" charset="-120"/>
-                <a:ea typeface="微軟正黑體" pitchFamily="34" charset="-120"/>
-              </a:rPr>
-              <a:t>雨</a:t>
-            </a:r>
-            <a:endParaRPr lang="en-US" altLang="zh-TW" sz="5400" b="1" dirty="0" smtClean="0">
-              <a:latin typeface="微軟正黑體" pitchFamily="34" charset="-120"/>
-              <a:ea typeface="微軟正黑體" pitchFamily="34" charset="-120"/>
-            </a:endParaRPr>
-          </a:p>
-          <a:p>
-            <a:pPr algn="ctr">
-              <a:buNone/>
-            </a:pPr>
-            <a:r>
-              <a:rPr lang="zh-TW" altLang="en-US" sz="5400" b="1" dirty="0" smtClean="0">
-                <a:latin typeface="微軟正黑體" pitchFamily="34" charset="-120"/>
-                <a:ea typeface="微軟正黑體" pitchFamily="34" charset="-120"/>
-              </a:rPr>
-              <a:t>神啊求</a:t>
-            </a:r>
-            <a:r>
-              <a:rPr lang="zh-TW" altLang="en-US" sz="5400" b="1" dirty="0">
-                <a:latin typeface="微軟正黑體" pitchFamily="34" charset="-120"/>
-                <a:ea typeface="微軟正黑體" pitchFamily="34" charset="-120"/>
-              </a:rPr>
-              <a:t>祢留心聽</a:t>
-            </a:r>
-          </a:p>
         </p:txBody>
       </p:sp>
     </p:spTree>
+    <p:extLst>
+      <p:ext uri="{BB962C8B-B14F-4D97-AF65-F5344CB8AC3E}">
+        <p14:creationId xmlns:p14="http://schemas.microsoft.com/office/powerpoint/2010/main" val="3885075056"/>
+      </p:ext>
+    </p:extLst>
   </p:cSld>
   <p:clrMapOvr>
     <a:masterClrMapping/>
@@ -3489,7 +3319,13 @@
   <p:cSld>
     <p:spTree>
       <p:nvGrpSpPr>
-        <p:cNvPr id="1" name=""/>
+        <p:cNvPr id="1" name="">
+          <a:extLst>
+            <a:ext uri="{FF2B5EF4-FFF2-40B4-BE49-F238E27FC236}">
+              <a16:creationId xmlns:a16="http://schemas.microsoft.com/office/drawing/2014/main" id="{6CF157A7-B338-28CB-99CE-C16860AC8152}"/>
+            </a:ext>
+          </a:extLst>
+        </p:cNvPr>
         <p:cNvGrpSpPr/>
         <p:nvPr/>
       </p:nvGrpSpPr>
@@ -3503,210 +3339,137 @@
       </p:grpSpPr>
       <p:sp>
         <p:nvSpPr>
-          <p:cNvPr id="2" name="標題 1"/>
-          <p:cNvSpPr>
-            <a:spLocks noGrp="1"/>
-          </p:cNvSpPr>
-          <p:nvPr>
-            <p:ph type="title"/>
-          </p:nvPr>
-        </p:nvSpPr>
-        <p:spPr/>
-        <p:txBody>
-          <a:bodyPr>
+          <p:cNvPr id="5" name="內容版面配置區 4">
+            <a:extLst>
+              <a:ext uri="{FF2B5EF4-FFF2-40B4-BE49-F238E27FC236}">
+                <a16:creationId xmlns:a16="http://schemas.microsoft.com/office/drawing/2014/main" id="{51CAAC02-A96F-3E6A-3DF0-8076D1195A55}"/>
+              </a:ext>
+            </a:extLst>
+          </p:cNvPr>
+          <p:cNvSpPr>
+            <a:spLocks noGrp="1"/>
+          </p:cNvSpPr>
+          <p:nvPr>
+            <p:ph idx="1"/>
+          </p:nvPr>
+        </p:nvSpPr>
+        <p:spPr>
+          <a:xfrm>
+            <a:off x="0" y="2084853"/>
+            <a:ext cx="12192000" cy="2404863"/>
+          </a:xfrm>
+        </p:spPr>
+        <p:txBody>
+          <a:bodyPr anchor="ctr">
             <a:normAutofit/>
           </a:bodyPr>
           <a:lstStyle/>
           <a:p>
-            <a:r>
-              <a:rPr lang="zh-TW" altLang="en-US" b="1" dirty="0">
+            <a:pPr algn="ctr">
+              <a:buNone/>
+            </a:pPr>
+            <a:r>
+              <a:rPr lang="zh-TW" altLang="en-US" sz="6400" b="1" dirty="0">
+                <a:solidFill>
+                  <a:srgbClr val="000066"/>
+                </a:solidFill>
                 <a:latin typeface="微軟正黑體" pitchFamily="34" charset="-120"/>
                 <a:ea typeface="微軟正黑體" pitchFamily="34" charset="-120"/>
               </a:rPr>
-              <a:t>父</a:t>
-            </a:r>
-            <a:r>
-              <a:rPr lang="zh-TW" altLang="en-US" b="1" dirty="0" smtClean="0">
+              <a:t>但祢從不定罪  滿有憐憫和恩惠</a:t>
+            </a:r>
+          </a:p>
+          <a:p>
+            <a:pPr algn="ctr">
+              <a:buNone/>
+            </a:pPr>
+            <a:r>
+              <a:rPr lang="zh-TW" altLang="en-US" sz="6400" b="1" dirty="0">
+                <a:solidFill>
+                  <a:srgbClr val="000066"/>
+                </a:solidFill>
                 <a:latin typeface="微軟正黑體" pitchFamily="34" charset="-120"/>
                 <a:ea typeface="微軟正黑體" pitchFamily="34" charset="-120"/>
               </a:rPr>
-              <a:t>啊我</a:t>
-            </a:r>
-            <a:r>
-              <a:rPr lang="zh-TW" altLang="en-US" b="1" dirty="0">
-                <a:latin typeface="微軟正黑體" pitchFamily="34" charset="-120"/>
-                <a:ea typeface="微軟正黑體" pitchFamily="34" charset="-120"/>
+              <a:t>溫柔的光照亮我心扉</a:t>
+            </a:r>
+          </a:p>
+        </p:txBody>
+      </p:sp>
+      <p:sp>
+        <p:nvSpPr>
+          <p:cNvPr id="3" name="TextBox 2">
+            <a:extLst>
+              <a:ext uri="{FF2B5EF4-FFF2-40B4-BE49-F238E27FC236}">
+                <a16:creationId xmlns:a16="http://schemas.microsoft.com/office/drawing/2014/main" id="{138C4354-5F34-41C2-8D79-6DD35CB6DA2B}"/>
+              </a:ext>
+            </a:extLst>
+          </p:cNvPr>
+          <p:cNvSpPr txBox="1"/>
+          <p:nvPr/>
+        </p:nvSpPr>
+        <p:spPr>
+          <a:xfrm>
+            <a:off x="0" y="5157194"/>
+            <a:ext cx="12192000" cy="584775"/>
+          </a:xfrm>
+          <a:prstGeom prst="rect">
+            <a:avLst/>
+          </a:prstGeom>
+          <a:noFill/>
+        </p:spPr>
+        <p:txBody>
+          <a:bodyPr wrap="square" rtlCol="0">
+            <a:spAutoFit/>
+          </a:bodyPr>
+          <a:lstStyle/>
+          <a:p>
+            <a:pPr algn="ctr"/>
+            <a:r>
+              <a:rPr lang="en-US" sz="3200" b="1" dirty="0">
+                <a:solidFill>
+                  <a:srgbClr val="000066"/>
+                </a:solidFill>
+                <a:latin typeface="Microsoft JhengHei" panose="020B0604030504040204" pitchFamily="34" charset="-120"/>
+                <a:ea typeface="Microsoft JhengHei" panose="020B0604030504040204" pitchFamily="34" charset="-120"/>
               </a:rPr>
-              <a:t>向祢呼求</a:t>
-            </a:r>
-          </a:p>
-        </p:txBody>
-      </p:sp>
-      <p:sp>
-        <p:nvSpPr>
-          <p:cNvPr id="4" name="內容版面配置區 3"/>
-          <p:cNvSpPr>
-            <a:spLocks noGrp="1"/>
-          </p:cNvSpPr>
-          <p:nvPr>
-            <p:ph idx="1"/>
-          </p:nvPr>
-        </p:nvSpPr>
-        <p:spPr/>
-        <p:txBody>
-          <a:bodyPr>
-            <a:noAutofit/>
-          </a:bodyPr>
-          <a:lstStyle/>
-          <a:p>
-            <a:pPr algn="ctr">
-              <a:buNone/>
-            </a:pPr>
-            <a:r>
-              <a:rPr lang="zh-TW" altLang="en-US" sz="5400" b="1" dirty="0">
-                <a:latin typeface="微軟正黑體" pitchFamily="34" charset="-120"/>
-                <a:ea typeface="微軟正黑體" pitchFamily="34" charset="-120"/>
+              <a:t>( </a:t>
+            </a:r>
+            <a:r>
+              <a:rPr lang="zh-CN" altLang="en-US" sz="3200" b="1" dirty="0">
+                <a:solidFill>
+                  <a:srgbClr val="000066"/>
+                </a:solidFill>
+                <a:latin typeface="Microsoft JhengHei" panose="020B0604030504040204" pitchFamily="34" charset="-120"/>
+                <a:ea typeface="Microsoft JhengHei" panose="020B0604030504040204" pitchFamily="34" charset="-120"/>
               </a:rPr>
-              <a:t>父</a:t>
-            </a:r>
-            <a:r>
-              <a:rPr lang="zh-TW" altLang="en-US" sz="5400" b="1" dirty="0" smtClean="0">
-                <a:latin typeface="微軟正黑體" pitchFamily="34" charset="-120"/>
-                <a:ea typeface="微軟正黑體" pitchFamily="34" charset="-120"/>
+              <a:t>正歌</a:t>
+            </a:r>
+            <a:r>
+              <a:rPr lang="en-US" sz="3200" b="1" dirty="0">
+                <a:solidFill>
+                  <a:srgbClr val="000066"/>
+                </a:solidFill>
+                <a:latin typeface="Microsoft JhengHei" panose="020B0604030504040204" pitchFamily="34" charset="-120"/>
+                <a:ea typeface="Microsoft JhengHei" panose="020B0604030504040204" pitchFamily="34" charset="-120"/>
               </a:rPr>
-              <a:t>啊我</a:t>
-            </a:r>
-            <a:r>
-              <a:rPr lang="zh-TW" altLang="en-US" sz="5400" b="1" dirty="0">
-                <a:latin typeface="微軟正黑體" pitchFamily="34" charset="-120"/>
-                <a:ea typeface="微軟正黑體" pitchFamily="34" charset="-120"/>
-              </a:rPr>
-              <a:t>向祢呼</a:t>
-            </a:r>
-            <a:r>
-              <a:rPr lang="zh-TW" altLang="en-US" sz="5400" b="1" dirty="0" smtClean="0">
-                <a:latin typeface="微軟正黑體" pitchFamily="34" charset="-120"/>
-                <a:ea typeface="微軟正黑體" pitchFamily="34" charset="-120"/>
-              </a:rPr>
-              <a:t>求</a:t>
-            </a:r>
-            <a:endParaRPr lang="en-US" altLang="zh-TW" sz="5400" b="1" dirty="0">
-              <a:latin typeface="微軟正黑體" pitchFamily="34" charset="-120"/>
-              <a:ea typeface="微軟正黑體" pitchFamily="34" charset="-120"/>
+              <a:t> )</a:t>
+            </a:r>
+            <a:endParaRPr lang="vi-VN" sz="3200" b="1" dirty="0">
+              <a:solidFill>
+                <a:srgbClr val="000066"/>
+              </a:solidFill>
+              <a:ea typeface="Microsoft JhengHei" panose="020B0604030504040204" pitchFamily="34" charset="-120"/>
             </a:endParaRPr>
           </a:p>
-          <a:p>
-            <a:pPr algn="ctr">
-              <a:buNone/>
-            </a:pPr>
-            <a:r>
-              <a:rPr lang="zh-TW" altLang="en-US" sz="5400" b="1" dirty="0" smtClean="0">
-                <a:latin typeface="微軟正黑體" pitchFamily="34" charset="-120"/>
-                <a:ea typeface="微軟正黑體" pitchFamily="34" charset="-120"/>
-              </a:rPr>
-              <a:t>醫治</a:t>
-            </a:r>
-            <a:r>
-              <a:rPr lang="zh-TW" altLang="en-US" sz="5400" b="1" dirty="0">
-                <a:latin typeface="微軟正黑體" pitchFamily="34" charset="-120"/>
-                <a:ea typeface="微軟正黑體" pitchFamily="34" charset="-120"/>
-              </a:rPr>
-              <a:t>我裏面的</a:t>
-            </a:r>
-            <a:r>
-              <a:rPr lang="zh-TW" altLang="en-US" sz="5400" b="1" dirty="0" smtClean="0">
-                <a:latin typeface="微軟正黑體" pitchFamily="34" charset="-120"/>
-                <a:ea typeface="微軟正黑體" pitchFamily="34" charset="-120"/>
-              </a:rPr>
-              <a:t>破碎</a:t>
-            </a:r>
-            <a:endParaRPr lang="en-US" altLang="zh-TW" sz="5400" b="1" dirty="0" smtClean="0">
-              <a:latin typeface="微軟正黑體" pitchFamily="34" charset="-120"/>
-              <a:ea typeface="微軟正黑體" pitchFamily="34" charset="-120"/>
-            </a:endParaRPr>
-          </a:p>
-          <a:p>
-            <a:pPr algn="ctr">
-              <a:buNone/>
-            </a:pPr>
-            <a:r>
-              <a:rPr lang="zh-TW" altLang="en-US" sz="5400" b="1" dirty="0" smtClean="0">
-                <a:latin typeface="微軟正黑體" pitchFamily="34" charset="-120"/>
-                <a:ea typeface="微軟正黑體" pitchFamily="34" charset="-120"/>
-              </a:rPr>
-              <a:t>當</a:t>
-            </a:r>
-            <a:r>
-              <a:rPr lang="zh-TW" altLang="en-US" sz="5400" b="1" dirty="0">
-                <a:latin typeface="微軟正黑體" pitchFamily="34" charset="-120"/>
-                <a:ea typeface="微軟正黑體" pitchFamily="34" charset="-120"/>
-              </a:rPr>
-              <a:t>我的心</a:t>
-            </a:r>
-            <a:r>
-              <a:rPr lang="zh-TW" altLang="en-US" sz="5400" b="1" dirty="0" smtClean="0">
-                <a:latin typeface="微軟正黑體" pitchFamily="34" charset="-120"/>
-                <a:ea typeface="微軟正黑體" pitchFamily="34" charset="-120"/>
-              </a:rPr>
-              <a:t>發昏</a:t>
-            </a:r>
-            <a:endParaRPr lang="en-US" altLang="zh-TW" sz="5400" b="1" dirty="0">
-              <a:latin typeface="微軟正黑體" pitchFamily="34" charset="-120"/>
-              <a:ea typeface="微軟正黑體" pitchFamily="34" charset="-120"/>
-            </a:endParaRPr>
-          </a:p>
-          <a:p>
-            <a:pPr algn="ctr">
-              <a:buNone/>
-            </a:pPr>
-            <a:r>
-              <a:rPr lang="zh-TW" altLang="en-US" sz="5400" b="1" dirty="0" smtClean="0">
-                <a:latin typeface="微軟正黑體" pitchFamily="34" charset="-120"/>
-                <a:ea typeface="微軟正黑體" pitchFamily="34" charset="-120"/>
-              </a:rPr>
-              <a:t>領</a:t>
-            </a:r>
-            <a:r>
-              <a:rPr lang="zh-TW" altLang="en-US" sz="5400" b="1" dirty="0">
-                <a:latin typeface="微軟正黑體" pitchFamily="34" charset="-120"/>
-                <a:ea typeface="微軟正黑體" pitchFamily="34" charset="-120"/>
-              </a:rPr>
-              <a:t>我到更高之</a:t>
-            </a:r>
-            <a:r>
-              <a:rPr lang="zh-TW" altLang="en-US" sz="5400" b="1" dirty="0" smtClean="0">
-                <a:latin typeface="微軟正黑體" pitchFamily="34" charset="-120"/>
-                <a:ea typeface="微軟正黑體" pitchFamily="34" charset="-120"/>
-              </a:rPr>
-              <a:t>地</a:t>
-            </a:r>
-            <a:endParaRPr lang="en-US" altLang="zh-TW" sz="5400" b="1" dirty="0" smtClean="0">
-              <a:latin typeface="微軟正黑體" pitchFamily="34" charset="-120"/>
-              <a:ea typeface="微軟正黑體" pitchFamily="34" charset="-120"/>
-            </a:endParaRPr>
-          </a:p>
-          <a:p>
-            <a:pPr algn="ctr">
-              <a:buNone/>
-            </a:pPr>
-            <a:r>
-              <a:rPr lang="zh-TW" altLang="en-US" sz="5400" b="1" dirty="0" smtClean="0">
-                <a:latin typeface="微軟正黑體" pitchFamily="34" charset="-120"/>
-                <a:ea typeface="微軟正黑體" pitchFamily="34" charset="-120"/>
-              </a:rPr>
-              <a:t>使</a:t>
-            </a:r>
-            <a:r>
-              <a:rPr lang="zh-TW" altLang="en-US" sz="5400" b="1" dirty="0">
-                <a:latin typeface="微軟正黑體" pitchFamily="34" charset="-120"/>
-                <a:ea typeface="微軟正黑體" pitchFamily="34" charset="-120"/>
-              </a:rPr>
-              <a:t>我高過四面的仇敵</a:t>
-            </a:r>
-          </a:p>
         </p:txBody>
       </p:sp>
     </p:spTree>
+    <p:extLst>
+      <p:ext uri="{BB962C8B-B14F-4D97-AF65-F5344CB8AC3E}">
+        <p14:creationId xmlns:p14="http://schemas.microsoft.com/office/powerpoint/2010/main" val="2491936850"/>
+      </p:ext>
+    </p:extLst>
   </p:cSld>
   <p:clrMapOvr>
     <a:masterClrMapping/>
@@ -3719,7 +3482,13 @@
   <p:cSld>
     <p:spTree>
       <p:nvGrpSpPr>
-        <p:cNvPr id="1" name=""/>
+        <p:cNvPr id="1" name="">
+          <a:extLst>
+            <a:ext uri="{FF2B5EF4-FFF2-40B4-BE49-F238E27FC236}">
+              <a16:creationId xmlns:a16="http://schemas.microsoft.com/office/drawing/2014/main" id="{E01836E4-EA17-1B99-ECDB-AD5BF3496646}"/>
+            </a:ext>
+          </a:extLst>
+        </p:cNvPr>
         <p:cNvGrpSpPr/>
         <p:nvPr/>
       </p:nvGrpSpPr>
@@ -3733,196 +3502,952 @@
       </p:grpSpPr>
       <p:sp>
         <p:nvSpPr>
-          <p:cNvPr id="2" name="標題 1"/>
-          <p:cNvSpPr>
-            <a:spLocks noGrp="1"/>
-          </p:cNvSpPr>
-          <p:nvPr>
-            <p:ph type="title"/>
-          </p:nvPr>
-        </p:nvSpPr>
-        <p:spPr/>
-        <p:txBody>
-          <a:bodyPr>
+          <p:cNvPr id="5" name="內容版面配置區 4">
+            <a:extLst>
+              <a:ext uri="{FF2B5EF4-FFF2-40B4-BE49-F238E27FC236}">
+                <a16:creationId xmlns:a16="http://schemas.microsoft.com/office/drawing/2014/main" id="{E7573A80-C632-7B05-3D92-057AF8A1F783}"/>
+              </a:ext>
+            </a:extLst>
+          </p:cNvPr>
+          <p:cNvSpPr>
+            <a:spLocks noGrp="1"/>
+          </p:cNvSpPr>
+          <p:nvPr>
+            <p:ph idx="1"/>
+          </p:nvPr>
+        </p:nvSpPr>
+        <p:spPr>
+          <a:xfrm>
+            <a:off x="0" y="2084853"/>
+            <a:ext cx="12192000" cy="2404863"/>
+          </a:xfrm>
+        </p:spPr>
+        <p:txBody>
+          <a:bodyPr anchor="ctr">
             <a:normAutofit/>
           </a:bodyPr>
           <a:lstStyle/>
           <a:p>
-            <a:r>
-              <a:rPr lang="zh-TW" altLang="en-US" b="1" dirty="0">
+            <a:pPr algn="ctr">
+              <a:buNone/>
+            </a:pPr>
+            <a:r>
+              <a:rPr lang="zh-TW" altLang="en-US" sz="6400" b="1" dirty="0">
+                <a:solidFill>
+                  <a:srgbClr val="000066"/>
+                </a:solidFill>
                 <a:latin typeface="微軟正黑體" pitchFamily="34" charset="-120"/>
                 <a:ea typeface="微軟正黑體" pitchFamily="34" charset="-120"/>
               </a:rPr>
-              <a:t>父</a:t>
-            </a:r>
-            <a:r>
-              <a:rPr lang="zh-TW" altLang="en-US" b="1" dirty="0" smtClean="0">
+              <a:t>我追想祢過往的作為</a:t>
+            </a:r>
+          </a:p>
+          <a:p>
+            <a:pPr algn="ctr">
+              <a:buNone/>
+            </a:pPr>
+            <a:r>
+              <a:rPr lang="zh-TW" altLang="en-US" sz="6400" b="1" dirty="0">
+                <a:solidFill>
+                  <a:srgbClr val="000066"/>
+                </a:solidFill>
                 <a:latin typeface="微軟正黑體" pitchFamily="34" charset="-120"/>
                 <a:ea typeface="微軟正黑體" pitchFamily="34" charset="-120"/>
               </a:rPr>
-              <a:t>啊我</a:t>
-            </a:r>
-            <a:r>
-              <a:rPr lang="zh-TW" altLang="en-US" b="1" dirty="0">
+              <a:t>我思念祢同在的榮顏</a:t>
+            </a:r>
+          </a:p>
+        </p:txBody>
+      </p:sp>
+      <p:sp>
+        <p:nvSpPr>
+          <p:cNvPr id="3" name="TextBox 2">
+            <a:extLst>
+              <a:ext uri="{FF2B5EF4-FFF2-40B4-BE49-F238E27FC236}">
+                <a16:creationId xmlns:a16="http://schemas.microsoft.com/office/drawing/2014/main" id="{935EF272-6DB8-C18B-C3D1-C04CA35A1058}"/>
+              </a:ext>
+            </a:extLst>
+          </p:cNvPr>
+          <p:cNvSpPr txBox="1"/>
+          <p:nvPr/>
+        </p:nvSpPr>
+        <p:spPr>
+          <a:xfrm>
+            <a:off x="0" y="5157194"/>
+            <a:ext cx="12192000" cy="584775"/>
+          </a:xfrm>
+          <a:prstGeom prst="rect">
+            <a:avLst/>
+          </a:prstGeom>
+          <a:noFill/>
+        </p:spPr>
+        <p:txBody>
+          <a:bodyPr wrap="square" rtlCol="0">
+            <a:spAutoFit/>
+          </a:bodyPr>
+          <a:lstStyle/>
+          <a:p>
+            <a:pPr algn="ctr"/>
+            <a:r>
+              <a:rPr lang="en-US" sz="3200" b="1" dirty="0">
+                <a:solidFill>
+                  <a:srgbClr val="000066"/>
+                </a:solidFill>
+                <a:latin typeface="Microsoft JhengHei" panose="020B0604030504040204" pitchFamily="34" charset="-120"/>
+                <a:ea typeface="Microsoft JhengHei" panose="020B0604030504040204" pitchFamily="34" charset="-120"/>
+              </a:rPr>
+              <a:t>( </a:t>
+            </a:r>
+            <a:r>
+              <a:rPr lang="zh-CN" altLang="en-US" sz="3200" b="1" dirty="0">
+                <a:solidFill>
+                  <a:srgbClr val="000066"/>
+                </a:solidFill>
+                <a:latin typeface="Microsoft JhengHei" panose="020B0604030504040204" pitchFamily="34" charset="-120"/>
+                <a:ea typeface="Microsoft JhengHei" panose="020B0604030504040204" pitchFamily="34" charset="-120"/>
+              </a:rPr>
+              <a:t>正歌</a:t>
+            </a:r>
+            <a:r>
+              <a:rPr lang="en-US" sz="3200" b="1" dirty="0">
+                <a:solidFill>
+                  <a:srgbClr val="000066"/>
+                </a:solidFill>
+                <a:latin typeface="Microsoft JhengHei" panose="020B0604030504040204" pitchFamily="34" charset="-120"/>
+                <a:ea typeface="Microsoft JhengHei" panose="020B0604030504040204" pitchFamily="34" charset="-120"/>
+              </a:rPr>
+              <a:t> )</a:t>
+            </a:r>
+            <a:endParaRPr lang="vi-VN" sz="3200" b="1" dirty="0">
+              <a:solidFill>
+                <a:srgbClr val="000066"/>
+              </a:solidFill>
+              <a:ea typeface="Microsoft JhengHei" panose="020B0604030504040204" pitchFamily="34" charset="-120"/>
+            </a:endParaRPr>
+          </a:p>
+        </p:txBody>
+      </p:sp>
+    </p:spTree>
+    <p:extLst>
+      <p:ext uri="{BB962C8B-B14F-4D97-AF65-F5344CB8AC3E}">
+        <p14:creationId xmlns:p14="http://schemas.microsoft.com/office/powerpoint/2010/main" val="287606960"/>
+      </p:ext>
+    </p:extLst>
+  </p:cSld>
+  <p:clrMapOvr>
+    <a:masterClrMapping/>
+  </p:clrMapOvr>
+</p:sld>
+</file>
+
+<file path=ppt/slides/slide5.xml><?xml version="1.0" encoding="utf-8"?>
+<p:sld xmlns:a="http://schemas.openxmlformats.org/drawingml/2006/main" xmlns:r="http://schemas.openxmlformats.org/officeDocument/2006/relationships" xmlns:p="http://schemas.openxmlformats.org/presentationml/2006/main">
+  <p:cSld>
+    <p:spTree>
+      <p:nvGrpSpPr>
+        <p:cNvPr id="1" name="">
+          <a:extLst>
+            <a:ext uri="{FF2B5EF4-FFF2-40B4-BE49-F238E27FC236}">
+              <a16:creationId xmlns:a16="http://schemas.microsoft.com/office/drawing/2014/main" id="{E282703F-F589-9B9D-6AE9-9A7B1DD22647}"/>
+            </a:ext>
+          </a:extLst>
+        </p:cNvPr>
+        <p:cNvGrpSpPr/>
+        <p:nvPr/>
+      </p:nvGrpSpPr>
+      <p:grpSpPr>
+        <a:xfrm>
+          <a:off x="0" y="0"/>
+          <a:ext cx="0" cy="0"/>
+          <a:chOff x="0" y="0"/>
+          <a:chExt cx="0" cy="0"/>
+        </a:xfrm>
+      </p:grpSpPr>
+      <p:sp>
+        <p:nvSpPr>
+          <p:cNvPr id="5" name="內容版面配置區 4">
+            <a:extLst>
+              <a:ext uri="{FF2B5EF4-FFF2-40B4-BE49-F238E27FC236}">
+                <a16:creationId xmlns:a16="http://schemas.microsoft.com/office/drawing/2014/main" id="{1BAE77C7-F451-ABE9-B8A0-C8D1E3664F4E}"/>
+              </a:ext>
+            </a:extLst>
+          </p:cNvPr>
+          <p:cNvSpPr>
+            <a:spLocks noGrp="1"/>
+          </p:cNvSpPr>
+          <p:nvPr>
+            <p:ph idx="1"/>
+          </p:nvPr>
+        </p:nvSpPr>
+        <p:spPr>
+          <a:xfrm>
+            <a:off x="0" y="2084853"/>
+            <a:ext cx="12192000" cy="2404863"/>
+          </a:xfrm>
+        </p:spPr>
+        <p:txBody>
+          <a:bodyPr anchor="ctr">
+            <a:normAutofit/>
+          </a:bodyPr>
+          <a:lstStyle/>
+          <a:p>
+            <a:pPr algn="ctr">
+              <a:buNone/>
+            </a:pPr>
+            <a:r>
+              <a:rPr lang="zh-CN" altLang="en-US" sz="6400" b="1" dirty="0">
+                <a:solidFill>
+                  <a:srgbClr val="000066"/>
+                </a:solidFill>
                 <a:latin typeface="微軟正黑體" pitchFamily="34" charset="-120"/>
                 <a:ea typeface="微軟正黑體" pitchFamily="34" charset="-120"/>
               </a:rPr>
-              <a:t>向祢呼求</a:t>
-            </a:r>
-          </a:p>
-        </p:txBody>
-      </p:sp>
-      <p:sp>
-        <p:nvSpPr>
-          <p:cNvPr id="4" name="內容版面配置區 3"/>
-          <p:cNvSpPr>
-            <a:spLocks noGrp="1"/>
-          </p:cNvSpPr>
-          <p:nvPr>
-            <p:ph idx="1"/>
-          </p:nvPr>
-        </p:nvSpPr>
-        <p:spPr/>
-        <p:txBody>
-          <a:bodyPr>
-            <a:noAutofit/>
-          </a:bodyPr>
-          <a:lstStyle/>
+              <a:t>我的心渴想祢  如乾旱之地盼雨</a:t>
+            </a:r>
+          </a:p>
           <a:p>
             <a:pPr algn="ctr">
               <a:buNone/>
             </a:pPr>
             <a:r>
-              <a:rPr lang="zh-TW" altLang="en-US" sz="5400" b="1" dirty="0">
+              <a:rPr lang="zh-CN" altLang="en-US" sz="6400" b="1" dirty="0">
+                <a:solidFill>
+                  <a:srgbClr val="000066"/>
+                </a:solidFill>
                 <a:latin typeface="微軟正黑體" pitchFamily="34" charset="-120"/>
                 <a:ea typeface="微軟正黑體" pitchFamily="34" charset="-120"/>
               </a:rPr>
-              <a:t>我要倚靠祢的</a:t>
-            </a:r>
-            <a:r>
-              <a:rPr lang="zh-TW" altLang="en-US" sz="5400" b="1" dirty="0" smtClean="0">
+              <a:t>神啊求祢留心聽</a:t>
+            </a:r>
+          </a:p>
+        </p:txBody>
+      </p:sp>
+      <p:sp>
+        <p:nvSpPr>
+          <p:cNvPr id="3" name="TextBox 2">
+            <a:extLst>
+              <a:ext uri="{FF2B5EF4-FFF2-40B4-BE49-F238E27FC236}">
+                <a16:creationId xmlns:a16="http://schemas.microsoft.com/office/drawing/2014/main" id="{128F5F39-84D3-DB6D-C597-50293ADC9CDC}"/>
+              </a:ext>
+            </a:extLst>
+          </p:cNvPr>
+          <p:cNvSpPr txBox="1"/>
+          <p:nvPr/>
+        </p:nvSpPr>
+        <p:spPr>
+          <a:xfrm>
+            <a:off x="0" y="5157194"/>
+            <a:ext cx="12192000" cy="584775"/>
+          </a:xfrm>
+          <a:prstGeom prst="rect">
+            <a:avLst/>
+          </a:prstGeom>
+          <a:noFill/>
+        </p:spPr>
+        <p:txBody>
+          <a:bodyPr wrap="square" rtlCol="0">
+            <a:spAutoFit/>
+          </a:bodyPr>
+          <a:lstStyle/>
+          <a:p>
+            <a:pPr algn="ctr"/>
+            <a:r>
+              <a:rPr lang="en-US" sz="3200" b="1" dirty="0">
+                <a:solidFill>
+                  <a:srgbClr val="000066"/>
+                </a:solidFill>
+                <a:latin typeface="Microsoft JhengHei" panose="020B0604030504040204" pitchFamily="34" charset="-120"/>
+                <a:ea typeface="Microsoft JhengHei" panose="020B0604030504040204" pitchFamily="34" charset="-120"/>
+              </a:rPr>
+              <a:t>( </a:t>
+            </a:r>
+            <a:r>
+              <a:rPr lang="zh-CN" altLang="en-US" sz="3200" b="1" dirty="0">
+                <a:solidFill>
+                  <a:srgbClr val="000066"/>
+                </a:solidFill>
+                <a:latin typeface="Microsoft JhengHei" panose="020B0604030504040204" pitchFamily="34" charset="-120"/>
+                <a:ea typeface="Microsoft JhengHei" panose="020B0604030504040204" pitchFamily="34" charset="-120"/>
+              </a:rPr>
+              <a:t>正歌</a:t>
+            </a:r>
+            <a:r>
+              <a:rPr lang="en-US" sz="3200" b="1" dirty="0">
+                <a:solidFill>
+                  <a:srgbClr val="000066"/>
+                </a:solidFill>
+                <a:latin typeface="Microsoft JhengHei" panose="020B0604030504040204" pitchFamily="34" charset="-120"/>
+                <a:ea typeface="Microsoft JhengHei" panose="020B0604030504040204" pitchFamily="34" charset="-120"/>
+              </a:rPr>
+              <a:t> )</a:t>
+            </a:r>
+            <a:endParaRPr lang="vi-VN" sz="3200" b="1" dirty="0">
+              <a:solidFill>
+                <a:srgbClr val="000066"/>
+              </a:solidFill>
+              <a:ea typeface="Microsoft JhengHei" panose="020B0604030504040204" pitchFamily="34" charset="-120"/>
+            </a:endParaRPr>
+          </a:p>
+        </p:txBody>
+      </p:sp>
+    </p:spTree>
+    <p:extLst>
+      <p:ext uri="{BB962C8B-B14F-4D97-AF65-F5344CB8AC3E}">
+        <p14:creationId xmlns:p14="http://schemas.microsoft.com/office/powerpoint/2010/main" val="238533718"/>
+      </p:ext>
+    </p:extLst>
+  </p:cSld>
+  <p:clrMapOvr>
+    <a:masterClrMapping/>
+  </p:clrMapOvr>
+</p:sld>
+</file>
+
+<file path=ppt/slides/slide6.xml><?xml version="1.0" encoding="utf-8"?>
+<p:sld xmlns:a="http://schemas.openxmlformats.org/drawingml/2006/main" xmlns:r="http://schemas.openxmlformats.org/officeDocument/2006/relationships" xmlns:p="http://schemas.openxmlformats.org/presentationml/2006/main">
+  <p:cSld>
+    <p:spTree>
+      <p:nvGrpSpPr>
+        <p:cNvPr id="1" name="">
+          <a:extLst>
+            <a:ext uri="{FF2B5EF4-FFF2-40B4-BE49-F238E27FC236}">
+              <a16:creationId xmlns:a16="http://schemas.microsoft.com/office/drawing/2014/main" id="{1BA75DA7-46BB-1EA1-FF46-34032D3591CC}"/>
+            </a:ext>
+          </a:extLst>
+        </p:cNvPr>
+        <p:cNvGrpSpPr/>
+        <p:nvPr/>
+      </p:nvGrpSpPr>
+      <p:grpSpPr>
+        <a:xfrm>
+          <a:off x="0" y="0"/>
+          <a:ext cx="0" cy="0"/>
+          <a:chOff x="0" y="0"/>
+          <a:chExt cx="0" cy="0"/>
+        </a:xfrm>
+      </p:grpSpPr>
+      <p:sp>
+        <p:nvSpPr>
+          <p:cNvPr id="5" name="內容版面配置區 4">
+            <a:extLst>
+              <a:ext uri="{FF2B5EF4-FFF2-40B4-BE49-F238E27FC236}">
+                <a16:creationId xmlns:a16="http://schemas.microsoft.com/office/drawing/2014/main" id="{B8620076-4AA5-86B0-5728-7A598FC2D236}"/>
+              </a:ext>
+            </a:extLst>
+          </p:cNvPr>
+          <p:cNvSpPr>
+            <a:spLocks noGrp="1"/>
+          </p:cNvSpPr>
+          <p:nvPr>
+            <p:ph idx="1"/>
+          </p:nvPr>
+        </p:nvSpPr>
+        <p:spPr>
+          <a:xfrm>
+            <a:off x="0" y="2084853"/>
+            <a:ext cx="12192000" cy="2404863"/>
+          </a:xfrm>
+        </p:spPr>
+        <p:txBody>
+          <a:bodyPr anchor="ctr">
+            <a:normAutofit/>
+          </a:bodyPr>
+          <a:lstStyle/>
+          <a:p>
+            <a:pPr algn="ctr">
+              <a:buNone/>
+            </a:pPr>
+            <a:r>
+              <a:rPr lang="zh-TW" altLang="en-US" sz="6400" b="1" dirty="0">
+                <a:solidFill>
+                  <a:srgbClr val="000066"/>
+                </a:solidFill>
                 <a:latin typeface="微軟正黑體" pitchFamily="34" charset="-120"/>
                 <a:ea typeface="微軟正黑體" pitchFamily="34" charset="-120"/>
               </a:rPr>
-              <a:t>慈愛</a:t>
-            </a:r>
-            <a:endParaRPr lang="en-US" altLang="zh-TW" sz="5400" b="1" dirty="0">
-              <a:latin typeface="微軟正黑體" pitchFamily="34" charset="-120"/>
-              <a:ea typeface="微軟正黑體" pitchFamily="34" charset="-120"/>
-            </a:endParaRPr>
+              <a:t>父啊我向祢呼求</a:t>
+            </a:r>
           </a:p>
           <a:p>
             <a:pPr algn="ctr">
               <a:buNone/>
             </a:pPr>
             <a:r>
-              <a:rPr lang="zh-TW" altLang="en-US" sz="5400" b="1" dirty="0" smtClean="0">
+              <a:rPr lang="zh-TW" altLang="en-US" sz="6400" b="1" dirty="0">
+                <a:solidFill>
+                  <a:srgbClr val="000066"/>
+                </a:solidFill>
                 <a:latin typeface="微軟正黑體" pitchFamily="34" charset="-120"/>
                 <a:ea typeface="微軟正黑體" pitchFamily="34" charset="-120"/>
               </a:rPr>
-              <a:t>要</a:t>
-            </a:r>
-            <a:r>
-              <a:rPr lang="zh-TW" altLang="en-US" sz="5400" b="1" dirty="0">
+              <a:t>醫治我裏面的破碎</a:t>
+            </a:r>
+          </a:p>
+        </p:txBody>
+      </p:sp>
+      <p:sp>
+        <p:nvSpPr>
+          <p:cNvPr id="3" name="TextBox 2">
+            <a:extLst>
+              <a:ext uri="{FF2B5EF4-FFF2-40B4-BE49-F238E27FC236}">
+                <a16:creationId xmlns:a16="http://schemas.microsoft.com/office/drawing/2014/main" id="{1F877756-F22B-1BE7-ECFE-E51BB9358249}"/>
+              </a:ext>
+            </a:extLst>
+          </p:cNvPr>
+          <p:cNvSpPr txBox="1"/>
+          <p:nvPr/>
+        </p:nvSpPr>
+        <p:spPr>
+          <a:xfrm>
+            <a:off x="0" y="5157194"/>
+            <a:ext cx="12192000" cy="584775"/>
+          </a:xfrm>
+          <a:prstGeom prst="rect">
+            <a:avLst/>
+          </a:prstGeom>
+          <a:noFill/>
+        </p:spPr>
+        <p:txBody>
+          <a:bodyPr wrap="square" rtlCol="0">
+            <a:spAutoFit/>
+          </a:bodyPr>
+          <a:lstStyle/>
+          <a:p>
+            <a:pPr algn="ctr"/>
+            <a:r>
+              <a:rPr lang="en-US" sz="3200" b="1" dirty="0">
+                <a:solidFill>
+                  <a:srgbClr val="000066"/>
+                </a:solidFill>
+                <a:latin typeface="Microsoft JhengHei" panose="020B0604030504040204" pitchFamily="34" charset="-120"/>
+                <a:ea typeface="Microsoft JhengHei" panose="020B0604030504040204" pitchFamily="34" charset="-120"/>
+              </a:rPr>
+              <a:t>( </a:t>
+            </a:r>
+            <a:r>
+              <a:rPr lang="zh-CN" altLang="en-US" sz="3200" b="1" dirty="0">
+                <a:solidFill>
+                  <a:srgbClr val="000066"/>
+                </a:solidFill>
+                <a:latin typeface="Microsoft JhengHei" panose="020B0604030504040204" pitchFamily="34" charset="-120"/>
+                <a:ea typeface="Microsoft JhengHei" panose="020B0604030504040204" pitchFamily="34" charset="-120"/>
+              </a:rPr>
+              <a:t>副歌</a:t>
+            </a:r>
+            <a:r>
+              <a:rPr lang="en-US" sz="3200" b="1" dirty="0">
+                <a:solidFill>
+                  <a:srgbClr val="000066"/>
+                </a:solidFill>
+                <a:latin typeface="Microsoft JhengHei" panose="020B0604030504040204" pitchFamily="34" charset="-120"/>
+                <a:ea typeface="Microsoft JhengHei" panose="020B0604030504040204" pitchFamily="34" charset="-120"/>
+              </a:rPr>
+              <a:t> )</a:t>
+            </a:r>
+            <a:endParaRPr lang="vi-VN" sz="3200" b="1" dirty="0">
+              <a:solidFill>
+                <a:srgbClr val="000066"/>
+              </a:solidFill>
+              <a:ea typeface="Microsoft JhengHei" panose="020B0604030504040204" pitchFamily="34" charset="-120"/>
+            </a:endParaRPr>
+          </a:p>
+        </p:txBody>
+      </p:sp>
+    </p:spTree>
+    <p:extLst>
+      <p:ext uri="{BB962C8B-B14F-4D97-AF65-F5344CB8AC3E}">
+        <p14:creationId xmlns:p14="http://schemas.microsoft.com/office/powerpoint/2010/main" val="2966069302"/>
+      </p:ext>
+    </p:extLst>
+  </p:cSld>
+  <p:clrMapOvr>
+    <a:masterClrMapping/>
+  </p:clrMapOvr>
+</p:sld>
+</file>
+
+<file path=ppt/slides/slide7.xml><?xml version="1.0" encoding="utf-8"?>
+<p:sld xmlns:a="http://schemas.openxmlformats.org/drawingml/2006/main" xmlns:r="http://schemas.openxmlformats.org/officeDocument/2006/relationships" xmlns:p="http://schemas.openxmlformats.org/presentationml/2006/main">
+  <p:cSld>
+    <p:spTree>
+      <p:nvGrpSpPr>
+        <p:cNvPr id="1" name="">
+          <a:extLst>
+            <a:ext uri="{FF2B5EF4-FFF2-40B4-BE49-F238E27FC236}">
+              <a16:creationId xmlns:a16="http://schemas.microsoft.com/office/drawing/2014/main" id="{6FE3626B-0ABE-B9F4-4197-C8ACDDC2927F}"/>
+            </a:ext>
+          </a:extLst>
+        </p:cNvPr>
+        <p:cNvGrpSpPr/>
+        <p:nvPr/>
+      </p:nvGrpSpPr>
+      <p:grpSpPr>
+        <a:xfrm>
+          <a:off x="0" y="0"/>
+          <a:ext cx="0" cy="0"/>
+          <a:chOff x="0" y="0"/>
+          <a:chExt cx="0" cy="0"/>
+        </a:xfrm>
+      </p:grpSpPr>
+      <p:sp>
+        <p:nvSpPr>
+          <p:cNvPr id="5" name="內容版面配置區 4">
+            <a:extLst>
+              <a:ext uri="{FF2B5EF4-FFF2-40B4-BE49-F238E27FC236}">
+                <a16:creationId xmlns:a16="http://schemas.microsoft.com/office/drawing/2014/main" id="{5AEDC747-6AEA-0FB0-1F4B-676A66AA102D}"/>
+              </a:ext>
+            </a:extLst>
+          </p:cNvPr>
+          <p:cNvSpPr>
+            <a:spLocks noGrp="1"/>
+          </p:cNvSpPr>
+          <p:nvPr>
+            <p:ph idx="1"/>
+          </p:nvPr>
+        </p:nvSpPr>
+        <p:spPr>
+          <a:xfrm>
+            <a:off x="0" y="2084853"/>
+            <a:ext cx="12192000" cy="2404863"/>
+          </a:xfrm>
+        </p:spPr>
+        <p:txBody>
+          <a:bodyPr anchor="ctr">
+            <a:normAutofit/>
+          </a:bodyPr>
+          <a:lstStyle/>
+          <a:p>
+            <a:pPr algn="ctr">
+              <a:buNone/>
+            </a:pPr>
+            <a:r>
+              <a:rPr lang="zh-TW" altLang="en-US" sz="6400" b="1" dirty="0">
+                <a:solidFill>
+                  <a:srgbClr val="000066"/>
+                </a:solidFill>
                 <a:latin typeface="微軟正黑體" pitchFamily="34" charset="-120"/>
                 <a:ea typeface="微軟正黑體" pitchFamily="34" charset="-120"/>
               </a:rPr>
-              <a:t>因祢的救恩</a:t>
-            </a:r>
-            <a:r>
-              <a:rPr lang="zh-TW" altLang="en-US" sz="5400" b="1" dirty="0" smtClean="0">
+              <a:t>當我的心發昏  領我到更高之地</a:t>
+            </a:r>
+          </a:p>
+          <a:p>
+            <a:pPr algn="ctr">
+              <a:buNone/>
+            </a:pPr>
+            <a:r>
+              <a:rPr lang="zh-TW" altLang="en-US" sz="6400" b="1" dirty="0">
+                <a:solidFill>
+                  <a:srgbClr val="000066"/>
+                </a:solidFill>
                 <a:latin typeface="微軟正黑體" pitchFamily="34" charset="-120"/>
                 <a:ea typeface="微軟正黑體" pitchFamily="34" charset="-120"/>
               </a:rPr>
-              <a:t>快樂</a:t>
-            </a:r>
-            <a:endParaRPr lang="en-US" altLang="zh-TW" sz="5400" b="1" dirty="0" smtClean="0">
-              <a:latin typeface="微軟正黑體" pitchFamily="34" charset="-120"/>
-              <a:ea typeface="微軟正黑體" pitchFamily="34" charset="-120"/>
+              <a:t>使我高過四面的仇敵</a:t>
+            </a:r>
+          </a:p>
+        </p:txBody>
+      </p:sp>
+      <p:sp>
+        <p:nvSpPr>
+          <p:cNvPr id="3" name="TextBox 2">
+            <a:extLst>
+              <a:ext uri="{FF2B5EF4-FFF2-40B4-BE49-F238E27FC236}">
+                <a16:creationId xmlns:a16="http://schemas.microsoft.com/office/drawing/2014/main" id="{61FA3D07-4795-139D-4830-F562D94D046C}"/>
+              </a:ext>
+            </a:extLst>
+          </p:cNvPr>
+          <p:cNvSpPr txBox="1"/>
+          <p:nvPr/>
+        </p:nvSpPr>
+        <p:spPr>
+          <a:xfrm>
+            <a:off x="0" y="5157194"/>
+            <a:ext cx="12192000" cy="584775"/>
+          </a:xfrm>
+          <a:prstGeom prst="rect">
+            <a:avLst/>
+          </a:prstGeom>
+          <a:noFill/>
+        </p:spPr>
+        <p:txBody>
+          <a:bodyPr wrap="square" rtlCol="0">
+            <a:spAutoFit/>
+          </a:bodyPr>
+          <a:lstStyle/>
+          <a:p>
+            <a:pPr algn="ctr"/>
+            <a:r>
+              <a:rPr lang="en-US" sz="3200" b="1" dirty="0">
+                <a:solidFill>
+                  <a:srgbClr val="000066"/>
+                </a:solidFill>
+                <a:latin typeface="Microsoft JhengHei" panose="020B0604030504040204" pitchFamily="34" charset="-120"/>
+                <a:ea typeface="Microsoft JhengHei" panose="020B0604030504040204" pitchFamily="34" charset="-120"/>
+              </a:rPr>
+              <a:t>( </a:t>
+            </a:r>
+            <a:r>
+              <a:rPr lang="zh-CN" altLang="en-US" sz="3200" b="1" dirty="0">
+                <a:solidFill>
+                  <a:srgbClr val="000066"/>
+                </a:solidFill>
+                <a:latin typeface="Microsoft JhengHei" panose="020B0604030504040204" pitchFamily="34" charset="-120"/>
+                <a:ea typeface="Microsoft JhengHei" panose="020B0604030504040204" pitchFamily="34" charset="-120"/>
+              </a:rPr>
+              <a:t>副歌</a:t>
+            </a:r>
+            <a:r>
+              <a:rPr lang="en-US" sz="3200" b="1" dirty="0">
+                <a:solidFill>
+                  <a:srgbClr val="000066"/>
+                </a:solidFill>
+                <a:latin typeface="Microsoft JhengHei" panose="020B0604030504040204" pitchFamily="34" charset="-120"/>
+                <a:ea typeface="Microsoft JhengHei" panose="020B0604030504040204" pitchFamily="34" charset="-120"/>
+              </a:rPr>
+              <a:t> )</a:t>
+            </a:r>
+            <a:endParaRPr lang="vi-VN" sz="3200" b="1" dirty="0">
+              <a:solidFill>
+                <a:srgbClr val="000066"/>
+              </a:solidFill>
+              <a:ea typeface="Microsoft JhengHei" panose="020B0604030504040204" pitchFamily="34" charset="-120"/>
             </a:endParaRPr>
           </a:p>
+        </p:txBody>
+      </p:sp>
+    </p:spTree>
+    <p:extLst>
+      <p:ext uri="{BB962C8B-B14F-4D97-AF65-F5344CB8AC3E}">
+        <p14:creationId xmlns:p14="http://schemas.microsoft.com/office/powerpoint/2010/main" val="2470451776"/>
+      </p:ext>
+    </p:extLst>
+  </p:cSld>
+  <p:clrMapOvr>
+    <a:masterClrMapping/>
+  </p:clrMapOvr>
+</p:sld>
+</file>
+
+<file path=ppt/slides/slide8.xml><?xml version="1.0" encoding="utf-8"?>
+<p:sld xmlns:a="http://schemas.openxmlformats.org/drawingml/2006/main" xmlns:r="http://schemas.openxmlformats.org/officeDocument/2006/relationships" xmlns:p="http://schemas.openxmlformats.org/presentationml/2006/main">
+  <p:cSld>
+    <p:spTree>
+      <p:nvGrpSpPr>
+        <p:cNvPr id="1" name="">
+          <a:extLst>
+            <a:ext uri="{FF2B5EF4-FFF2-40B4-BE49-F238E27FC236}">
+              <a16:creationId xmlns:a16="http://schemas.microsoft.com/office/drawing/2014/main" id="{EE37C5B9-2266-B8D9-1273-20A2D52854C6}"/>
+            </a:ext>
+          </a:extLst>
+        </p:cNvPr>
+        <p:cNvGrpSpPr/>
+        <p:nvPr/>
+      </p:nvGrpSpPr>
+      <p:grpSpPr>
+        <a:xfrm>
+          <a:off x="0" y="0"/>
+          <a:ext cx="0" cy="0"/>
+          <a:chOff x="0" y="0"/>
+          <a:chExt cx="0" cy="0"/>
+        </a:xfrm>
+      </p:grpSpPr>
+      <p:sp>
+        <p:nvSpPr>
+          <p:cNvPr id="5" name="內容版面配置區 4">
+            <a:extLst>
+              <a:ext uri="{FF2B5EF4-FFF2-40B4-BE49-F238E27FC236}">
+                <a16:creationId xmlns:a16="http://schemas.microsoft.com/office/drawing/2014/main" id="{6E44F186-F02A-47DC-E2B8-CFE923F90BEE}"/>
+              </a:ext>
+            </a:extLst>
+          </p:cNvPr>
+          <p:cNvSpPr>
+            <a:spLocks noGrp="1"/>
+          </p:cNvSpPr>
+          <p:nvPr>
+            <p:ph idx="1"/>
+          </p:nvPr>
+        </p:nvSpPr>
+        <p:spPr>
+          <a:xfrm>
+            <a:off x="0" y="2084853"/>
+            <a:ext cx="12192000" cy="2404863"/>
+          </a:xfrm>
+        </p:spPr>
+        <p:txBody>
+          <a:bodyPr anchor="ctr">
+            <a:normAutofit/>
+          </a:bodyPr>
+          <a:lstStyle/>
           <a:p>
             <a:pPr algn="ctr">
               <a:buNone/>
             </a:pPr>
             <a:r>
-              <a:rPr lang="zh-TW" altLang="en-US" sz="5400" b="1" dirty="0" smtClean="0">
+              <a:rPr lang="zh-TW" altLang="en-US" sz="6400" b="1" dirty="0">
+                <a:solidFill>
+                  <a:srgbClr val="000066"/>
+                </a:solidFill>
                 <a:latin typeface="微軟正黑體" pitchFamily="34" charset="-120"/>
                 <a:ea typeface="微軟正黑體" pitchFamily="34" charset="-120"/>
               </a:rPr>
-              <a:t>容</a:t>
-            </a:r>
-            <a:r>
-              <a:rPr lang="zh-TW" altLang="en-US" sz="5400" b="1" dirty="0">
+              <a:t>我要倚靠祢的慈愛</a:t>
+            </a:r>
+          </a:p>
+          <a:p>
+            <a:pPr algn="ctr">
+              <a:buNone/>
+            </a:pPr>
+            <a:r>
+              <a:rPr lang="zh-TW" altLang="en-US" sz="6400" b="1" dirty="0">
+                <a:solidFill>
+                  <a:srgbClr val="000066"/>
+                </a:solidFill>
                 <a:latin typeface="微軟正黑體" pitchFamily="34" charset="-120"/>
                 <a:ea typeface="微軟正黑體" pitchFamily="34" charset="-120"/>
               </a:rPr>
-              <a:t>我到祢聖</a:t>
-            </a:r>
-            <a:r>
-              <a:rPr lang="zh-TW" altLang="en-US" sz="5400" b="1" dirty="0" smtClean="0">
+              <a:t>要因祢的救恩快樂</a:t>
+            </a:r>
+          </a:p>
+        </p:txBody>
+      </p:sp>
+      <p:sp>
+        <p:nvSpPr>
+          <p:cNvPr id="3" name="TextBox 2">
+            <a:extLst>
+              <a:ext uri="{FF2B5EF4-FFF2-40B4-BE49-F238E27FC236}">
+                <a16:creationId xmlns:a16="http://schemas.microsoft.com/office/drawing/2014/main" id="{C2173F02-5910-8EFF-DBEB-49AE16E2B88A}"/>
+              </a:ext>
+            </a:extLst>
+          </p:cNvPr>
+          <p:cNvSpPr txBox="1"/>
+          <p:nvPr/>
+        </p:nvSpPr>
+        <p:spPr>
+          <a:xfrm>
+            <a:off x="0" y="5157194"/>
+            <a:ext cx="12192000" cy="584775"/>
+          </a:xfrm>
+          <a:prstGeom prst="rect">
+            <a:avLst/>
+          </a:prstGeom>
+          <a:noFill/>
+        </p:spPr>
+        <p:txBody>
+          <a:bodyPr wrap="square" rtlCol="0">
+            <a:spAutoFit/>
+          </a:bodyPr>
+          <a:lstStyle/>
+          <a:p>
+            <a:pPr algn="ctr"/>
+            <a:r>
+              <a:rPr lang="en-US" sz="3200" b="1" dirty="0">
+                <a:solidFill>
+                  <a:srgbClr val="000066"/>
+                </a:solidFill>
+                <a:latin typeface="Microsoft JhengHei" panose="020B0604030504040204" pitchFamily="34" charset="-120"/>
+                <a:ea typeface="Microsoft JhengHei" panose="020B0604030504040204" pitchFamily="34" charset="-120"/>
+              </a:rPr>
+              <a:t>( </a:t>
+            </a:r>
+            <a:r>
+              <a:rPr lang="zh-CN" altLang="en-US" sz="3200" b="1" dirty="0">
+                <a:solidFill>
+                  <a:srgbClr val="000066"/>
+                </a:solidFill>
+                <a:latin typeface="Microsoft JhengHei" panose="020B0604030504040204" pitchFamily="34" charset="-120"/>
+                <a:ea typeface="Microsoft JhengHei" panose="020B0604030504040204" pitchFamily="34" charset="-120"/>
+              </a:rPr>
+              <a:t>副歌</a:t>
+            </a:r>
+            <a:r>
+              <a:rPr lang="en-US" sz="3200" b="1" dirty="0">
+                <a:solidFill>
+                  <a:srgbClr val="000066"/>
+                </a:solidFill>
+                <a:latin typeface="Microsoft JhengHei" panose="020B0604030504040204" pitchFamily="34" charset="-120"/>
+                <a:ea typeface="Microsoft JhengHei" panose="020B0604030504040204" pitchFamily="34" charset="-120"/>
+              </a:rPr>
+              <a:t> )</a:t>
+            </a:r>
+            <a:endParaRPr lang="vi-VN" sz="3200" b="1" dirty="0">
+              <a:solidFill>
+                <a:srgbClr val="000066"/>
+              </a:solidFill>
+              <a:ea typeface="Microsoft JhengHei" panose="020B0604030504040204" pitchFamily="34" charset="-120"/>
+            </a:endParaRPr>
+          </a:p>
+        </p:txBody>
+      </p:sp>
+    </p:spTree>
+    <p:extLst>
+      <p:ext uri="{BB962C8B-B14F-4D97-AF65-F5344CB8AC3E}">
+        <p14:creationId xmlns:p14="http://schemas.microsoft.com/office/powerpoint/2010/main" val="1914876450"/>
+      </p:ext>
+    </p:extLst>
+  </p:cSld>
+  <p:clrMapOvr>
+    <a:masterClrMapping/>
+  </p:clrMapOvr>
+</p:sld>
+</file>
+
+<file path=ppt/slides/slide9.xml><?xml version="1.0" encoding="utf-8"?>
+<p:sld xmlns:a="http://schemas.openxmlformats.org/drawingml/2006/main" xmlns:r="http://schemas.openxmlformats.org/officeDocument/2006/relationships" xmlns:p="http://schemas.openxmlformats.org/presentationml/2006/main">
+  <p:cSld>
+    <p:spTree>
+      <p:nvGrpSpPr>
+        <p:cNvPr id="1" name="">
+          <a:extLst>
+            <a:ext uri="{FF2B5EF4-FFF2-40B4-BE49-F238E27FC236}">
+              <a16:creationId xmlns:a16="http://schemas.microsoft.com/office/drawing/2014/main" id="{B6C7D956-C5C5-416F-62CD-C5214624F2EF}"/>
+            </a:ext>
+          </a:extLst>
+        </p:cNvPr>
+        <p:cNvGrpSpPr/>
+        <p:nvPr/>
+      </p:nvGrpSpPr>
+      <p:grpSpPr>
+        <a:xfrm>
+          <a:off x="0" y="0"/>
+          <a:ext cx="0" cy="0"/>
+          <a:chOff x="0" y="0"/>
+          <a:chExt cx="0" cy="0"/>
+        </a:xfrm>
+      </p:grpSpPr>
+      <p:sp>
+        <p:nvSpPr>
+          <p:cNvPr id="5" name="內容版面配置區 4">
+            <a:extLst>
+              <a:ext uri="{FF2B5EF4-FFF2-40B4-BE49-F238E27FC236}">
+                <a16:creationId xmlns:a16="http://schemas.microsoft.com/office/drawing/2014/main" id="{013D67C9-244C-5C26-8208-E2F0C1C3AED8}"/>
+              </a:ext>
+            </a:extLst>
+          </p:cNvPr>
+          <p:cNvSpPr>
+            <a:spLocks noGrp="1"/>
+          </p:cNvSpPr>
+          <p:nvPr>
+            <p:ph idx="1"/>
+          </p:nvPr>
+        </p:nvSpPr>
+        <p:spPr>
+          <a:xfrm>
+            <a:off x="0" y="2084853"/>
+            <a:ext cx="12192000" cy="2404863"/>
+          </a:xfrm>
+        </p:spPr>
+        <p:txBody>
+          <a:bodyPr anchor="ctr">
+            <a:normAutofit/>
+          </a:bodyPr>
+          <a:lstStyle/>
+          <a:p>
+            <a:pPr algn="ctr">
+              <a:buNone/>
+            </a:pPr>
+            <a:r>
+              <a:rPr lang="zh-TW" altLang="en-US" sz="6400" b="1" dirty="0">
+                <a:solidFill>
+                  <a:srgbClr val="000066"/>
+                </a:solidFill>
                 <a:latin typeface="微軟正黑體" pitchFamily="34" charset="-120"/>
                 <a:ea typeface="微軟正黑體" pitchFamily="34" charset="-120"/>
               </a:rPr>
-              <a:t>所</a:t>
-            </a:r>
-            <a:endParaRPr lang="en-US" altLang="zh-TW" sz="5400" b="1" dirty="0">
-              <a:latin typeface="微軟正黑體" pitchFamily="34" charset="-120"/>
-              <a:ea typeface="微軟正黑體" pitchFamily="34" charset="-120"/>
-            </a:endParaRPr>
+              <a:t>容我到祢聖所  瞻仰祢榮耀能力</a:t>
+            </a:r>
           </a:p>
           <a:p>
             <a:pPr algn="ctr">
               <a:buNone/>
             </a:pPr>
             <a:r>
-              <a:rPr lang="zh-TW" altLang="en-US" sz="5400" b="1" dirty="0" smtClean="0">
+              <a:rPr lang="zh-TW" altLang="en-US" sz="6400" b="1" dirty="0">
+                <a:solidFill>
+                  <a:srgbClr val="000066"/>
+                </a:solidFill>
                 <a:latin typeface="微軟正黑體" pitchFamily="34" charset="-120"/>
                 <a:ea typeface="微軟正黑體" pitchFamily="34" charset="-120"/>
               </a:rPr>
-              <a:t>瞻仰</a:t>
-            </a:r>
-            <a:r>
-              <a:rPr lang="zh-TW" altLang="en-US" sz="5400" b="1" dirty="0">
-                <a:latin typeface="微軟正黑體" pitchFamily="34" charset="-120"/>
-                <a:ea typeface="微軟正黑體" pitchFamily="34" charset="-120"/>
+              <a:t>以歡樂的嘴唇讚美祢</a:t>
+            </a:r>
+          </a:p>
+        </p:txBody>
+      </p:sp>
+      <p:sp>
+        <p:nvSpPr>
+          <p:cNvPr id="3" name="TextBox 2">
+            <a:extLst>
+              <a:ext uri="{FF2B5EF4-FFF2-40B4-BE49-F238E27FC236}">
+                <a16:creationId xmlns:a16="http://schemas.microsoft.com/office/drawing/2014/main" id="{8E675206-826F-93CB-CED2-875ACAAE1484}"/>
+              </a:ext>
+            </a:extLst>
+          </p:cNvPr>
+          <p:cNvSpPr txBox="1"/>
+          <p:nvPr/>
+        </p:nvSpPr>
+        <p:spPr>
+          <a:xfrm>
+            <a:off x="0" y="5157194"/>
+            <a:ext cx="12192000" cy="584775"/>
+          </a:xfrm>
+          <a:prstGeom prst="rect">
+            <a:avLst/>
+          </a:prstGeom>
+          <a:noFill/>
+        </p:spPr>
+        <p:txBody>
+          <a:bodyPr wrap="square" rtlCol="0">
+            <a:spAutoFit/>
+          </a:bodyPr>
+          <a:lstStyle/>
+          <a:p>
+            <a:pPr algn="ctr"/>
+            <a:r>
+              <a:rPr lang="en-US" sz="3200" b="1" dirty="0">
+                <a:solidFill>
+                  <a:srgbClr val="000066"/>
+                </a:solidFill>
+                <a:latin typeface="Microsoft JhengHei" panose="020B0604030504040204" pitchFamily="34" charset="-120"/>
+                <a:ea typeface="Microsoft JhengHei" panose="020B0604030504040204" pitchFamily="34" charset="-120"/>
               </a:rPr>
-              <a:t>祢榮耀</a:t>
-            </a:r>
-            <a:r>
-              <a:rPr lang="zh-TW" altLang="en-US" sz="5400" b="1" dirty="0" smtClean="0">
-                <a:latin typeface="微軟正黑體" pitchFamily="34" charset="-120"/>
-                <a:ea typeface="微軟正黑體" pitchFamily="34" charset="-120"/>
+              <a:t>( </a:t>
+            </a:r>
+            <a:r>
+              <a:rPr lang="zh-CN" altLang="en-US" sz="3200" b="1" dirty="0">
+                <a:solidFill>
+                  <a:srgbClr val="000066"/>
+                </a:solidFill>
+                <a:latin typeface="Microsoft JhengHei" panose="020B0604030504040204" pitchFamily="34" charset="-120"/>
+                <a:ea typeface="Microsoft JhengHei" panose="020B0604030504040204" pitchFamily="34" charset="-120"/>
               </a:rPr>
-              <a:t>能力</a:t>
-            </a:r>
-            <a:endParaRPr lang="en-US" altLang="zh-TW" sz="5400" b="1" dirty="0" smtClean="0">
-              <a:latin typeface="微軟正黑體" pitchFamily="34" charset="-120"/>
-              <a:ea typeface="微軟正黑體" pitchFamily="34" charset="-120"/>
+              <a:t>副歌</a:t>
+            </a:r>
+            <a:r>
+              <a:rPr lang="en-US" sz="3200" b="1" dirty="0">
+                <a:solidFill>
+                  <a:srgbClr val="000066"/>
+                </a:solidFill>
+                <a:latin typeface="Microsoft JhengHei" panose="020B0604030504040204" pitchFamily="34" charset="-120"/>
+                <a:ea typeface="Microsoft JhengHei" panose="020B0604030504040204" pitchFamily="34" charset="-120"/>
+              </a:rPr>
+              <a:t> )</a:t>
+            </a:r>
+            <a:endParaRPr lang="vi-VN" sz="3200" b="1" dirty="0">
+              <a:solidFill>
+                <a:srgbClr val="000066"/>
+              </a:solidFill>
+              <a:ea typeface="Microsoft JhengHei" panose="020B0604030504040204" pitchFamily="34" charset="-120"/>
             </a:endParaRPr>
           </a:p>
-          <a:p>
-            <a:pPr algn="ctr">
-              <a:buNone/>
-            </a:pPr>
-            <a:r>
-              <a:rPr lang="zh-TW" altLang="en-US" sz="5400" b="1" dirty="0" smtClean="0">
-                <a:latin typeface="微軟正黑體" pitchFamily="34" charset="-120"/>
-                <a:ea typeface="微軟正黑體" pitchFamily="34" charset="-120"/>
-              </a:rPr>
-              <a:t>以</a:t>
-            </a:r>
-            <a:r>
-              <a:rPr lang="zh-TW" altLang="en-US" sz="5400" b="1" dirty="0">
-                <a:latin typeface="微軟正黑體" pitchFamily="34" charset="-120"/>
-                <a:ea typeface="微軟正黑體" pitchFamily="34" charset="-120"/>
-              </a:rPr>
-              <a:t>歡樂的嘴唇讚美祢</a:t>
-            </a:r>
-          </a:p>
         </p:txBody>
       </p:sp>
     </p:spTree>
+    <p:extLst>
+      <p:ext uri="{BB962C8B-B14F-4D97-AF65-F5344CB8AC3E}">
+        <p14:creationId xmlns:p14="http://schemas.microsoft.com/office/powerpoint/2010/main" val="359734016"/>
+      </p:ext>
+    </p:extLst>
   </p:cSld>
   <p:clrMapOvr>
     <a:masterClrMapping/>
